--- a/Data Mining and Analytics -21CSE355T/Unit-4/ppt/9_CLIQUE_Algorithm.pptx
+++ b/Data Mining and Analytics -21CSE355T/Unit-4/ppt/9_CLIQUE_Algorithm.pptx
@@ -68,29 +68,57 @@
             <a:noAutofit/>
           </a:bodyPr>
           <a:p>
+            <a:pPr algn="ctr"/>
             <a:r>
-              <a:rPr b="0" lang="en-US" sz="1800" spc="-1" strike="noStrike">
+              <a:rPr b="0" lang="en-US" sz="4400" spc="-1" strike="noStrike">
                 <a:solidFill>
-                  <a:schemeClr val="dk1"/>
+                  <a:srgbClr val="000000"/>
                 </a:solidFill>
-                <a:latin typeface="Calibri"/>
+                <a:latin typeface="Arial"/>
               </a:rPr>
-              <a:t>Click to move the </a:t>
+              <a:t>Click </a:t>
             </a:r>
             <a:r>
-              <a:rPr b="0" lang="en-US" sz="1800" spc="-1" strike="noStrike">
+              <a:rPr b="0" lang="en-US" sz="4400" spc="-1" strike="noStrike">
                 <a:solidFill>
-                  <a:schemeClr val="dk1"/>
+                  <a:srgbClr val="000000"/>
                 </a:solidFill>
-                <a:latin typeface="Calibri"/>
+                <a:latin typeface="Arial"/>
+              </a:rPr>
+              <a:t>to </a:t>
+            </a:r>
+            <a:r>
+              <a:rPr b="0" lang="en-US" sz="4400" spc="-1" strike="noStrike">
+                <a:solidFill>
+                  <a:srgbClr val="000000"/>
+                </a:solidFill>
+                <a:latin typeface="Arial"/>
+              </a:rPr>
+              <a:t>move </a:t>
+            </a:r>
+            <a:r>
+              <a:rPr b="0" lang="en-US" sz="4400" spc="-1" strike="noStrike">
+                <a:solidFill>
+                  <a:srgbClr val="000000"/>
+                </a:solidFill>
+                <a:latin typeface="Arial"/>
+              </a:rPr>
+              <a:t>the </a:t>
+            </a:r>
+            <a:r>
+              <a:rPr b="0" lang="en-US" sz="4400" spc="-1" strike="noStrike">
+                <a:solidFill>
+                  <a:srgbClr val="000000"/>
+                </a:solidFill>
+                <a:latin typeface="Arial"/>
               </a:rPr>
               <a:t>slide</a:t>
             </a:r>
-            <a:endParaRPr b="0" lang="en-US" sz="1800" spc="-1" strike="noStrike">
-              <a:solidFill>
-                <a:schemeClr val="dk1"/>
-              </a:solidFill>
-              <a:latin typeface="Calibri"/>
+            <a:endParaRPr b="0" lang="en-US" sz="4400" spc="-1" strike="noStrike">
+              <a:solidFill>
+                <a:srgbClr val="000000"/>
+              </a:solidFill>
+              <a:latin typeface="Arial"/>
             </a:endParaRPr>
           </a:p>
         </p:txBody>
@@ -133,7 +161,7 @@
                 </a:solidFill>
                 <a:latin typeface="Arial"/>
               </a:rPr>
-              <a:t>Click to edit the </a:t>
+              <a:t>Click to edit </a:t>
             </a:r>
             <a:r>
               <a:rPr b="0" lang="en-US" sz="2000" spc="-1" strike="noStrike">
@@ -142,7 +170,16 @@
                 </a:solidFill>
                 <a:latin typeface="Arial"/>
               </a:rPr>
-              <a:t>notes format</a:t>
+              <a:t>the notes </a:t>
+            </a:r>
+            <a:r>
+              <a:rPr b="0" lang="en-US" sz="2000" spc="-1" strike="noStrike">
+                <a:solidFill>
+                  <a:srgbClr val="000000"/>
+                </a:solidFill>
+                <a:latin typeface="Arial"/>
+              </a:rPr>
+              <a:t>format</a:t>
             </a:r>
             <a:endParaRPr b="0" lang="en-US" sz="2000" spc="-1" strike="noStrike">
               <a:solidFill>
@@ -364,7 +401,7 @@
             <a:pPr indent="0" algn="r">
               <a:buNone/>
             </a:pPr>
-            <a:fld id="{DB2D9B64-6814-4BD7-990A-37D80E65A2D3}" type="slidenum">
+            <a:fld id="{9B9106AE-2507-4404-A6E9-FA64957589EA}" type="slidenum">
               <a:rPr b="0" lang="en-US" sz="1400" spc="-1" strike="noStrike">
                 <a:solidFill>
                   <a:srgbClr val="000000"/>
@@ -418,7 +455,7 @@
         <p:spPr>
           <a:xfrm>
             <a:off x="685800" y="1143000"/>
-            <a:ext cx="5486040" cy="3085920"/>
+            <a:ext cx="5485680" cy="3085560"/>
           </a:xfrm>
           <a:prstGeom prst="rect">
             <a:avLst/>
@@ -441,7 +478,7 @@
         <p:spPr>
           <a:xfrm>
             <a:off x="685800" y="4400640"/>
-            <a:ext cx="5486040" cy="3600000"/>
+            <a:ext cx="5485680" cy="3599640"/>
           </a:xfrm>
           <a:prstGeom prst="rect">
             <a:avLst/>
@@ -481,7 +518,7 @@
         <p:spPr>
           <a:xfrm>
             <a:off x="3884760" y="8685360"/>
-            <a:ext cx="2971440" cy="458280"/>
+            <a:ext cx="2971080" cy="457920"/>
           </a:xfrm>
           <a:prstGeom prst="rect">
             <a:avLst/>
@@ -501,6 +538,9 @@
                 <a:spcPct val="100000"/>
               </a:lnSpc>
               <a:buNone/>
+              <a:tabLst>
+                <a:tab algn="l" pos="0"/>
+              </a:tabLst>
               <a:defRPr b="0" lang="en-US" sz="1200" spc="-1" strike="noStrike">
                 <a:solidFill>
                   <a:schemeClr val="dk1"/>
@@ -516,8 +556,11 @@
                 <a:spcPct val="100000"/>
               </a:lnSpc>
               <a:buNone/>
-            </a:pPr>
-            <a:fld id="{66F36F06-FADF-4CA7-9B50-3551194F0BD7}" type="slidenum">
+              <a:tabLst>
+                <a:tab algn="l" pos="0"/>
+              </a:tabLst>
+            </a:pPr>
+            <a:fld id="{54AB3999-4EDD-4491-B708-8C17E290F82D}" type="slidenum">
               <a:rPr b="0" lang="en-US" sz="1200" spc="-1" strike="noStrike">
                 <a:solidFill>
                   <a:schemeClr val="dk1"/>
@@ -571,7 +614,7 @@
         <p:spPr>
           <a:xfrm>
             <a:off x="685800" y="1143000"/>
-            <a:ext cx="5486040" cy="3085920"/>
+            <a:ext cx="5485680" cy="3085560"/>
           </a:xfrm>
           <a:prstGeom prst="rect">
             <a:avLst/>
@@ -594,7 +637,7 @@
         <p:spPr>
           <a:xfrm>
             <a:off x="685800" y="4400640"/>
-            <a:ext cx="5486040" cy="3600000"/>
+            <a:ext cx="5485680" cy="3599640"/>
           </a:xfrm>
           <a:prstGeom prst="rect">
             <a:avLst/>
@@ -634,7 +677,7 @@
         <p:spPr>
           <a:xfrm>
             <a:off x="3884760" y="8685360"/>
-            <a:ext cx="2971440" cy="458280"/>
+            <a:ext cx="2971080" cy="457920"/>
           </a:xfrm>
           <a:prstGeom prst="rect">
             <a:avLst/>
@@ -654,6 +697,9 @@
                 <a:spcPct val="100000"/>
               </a:lnSpc>
               <a:buNone/>
+              <a:tabLst>
+                <a:tab algn="l" pos="0"/>
+              </a:tabLst>
               <a:defRPr b="0" lang="en-US" sz="1200" spc="-1" strike="noStrike">
                 <a:solidFill>
                   <a:schemeClr val="dk1"/>
@@ -669,8 +715,11 @@
                 <a:spcPct val="100000"/>
               </a:lnSpc>
               <a:buNone/>
-            </a:pPr>
-            <a:fld id="{2A29AAAE-09F1-48EE-AD5C-9165EEAB05A2}" type="slidenum">
+              <a:tabLst>
+                <a:tab algn="l" pos="0"/>
+              </a:tabLst>
+            </a:pPr>
+            <a:fld id="{B27D2D2F-2257-4C54-9BD6-F610F15EF57F}" type="slidenum">
               <a:rPr b="0" lang="en-US" sz="1200" spc="-1" strike="noStrike">
                 <a:solidFill>
                   <a:schemeClr val="dk1"/>
@@ -724,7 +773,7 @@
         <p:spPr>
           <a:xfrm>
             <a:off x="685800" y="1143000"/>
-            <a:ext cx="5486040" cy="3085920"/>
+            <a:ext cx="5485680" cy="3085560"/>
           </a:xfrm>
           <a:prstGeom prst="rect">
             <a:avLst/>
@@ -747,7 +796,7 @@
         <p:spPr>
           <a:xfrm>
             <a:off x="685800" y="4400640"/>
-            <a:ext cx="5486040" cy="3600000"/>
+            <a:ext cx="5485680" cy="3599640"/>
           </a:xfrm>
           <a:prstGeom prst="rect">
             <a:avLst/>
@@ -787,7 +836,7 @@
         <p:spPr>
           <a:xfrm>
             <a:off x="3884760" y="8685360"/>
-            <a:ext cx="2971440" cy="458280"/>
+            <a:ext cx="2971080" cy="457920"/>
           </a:xfrm>
           <a:prstGeom prst="rect">
             <a:avLst/>
@@ -807,6 +856,9 @@
                 <a:spcPct val="100000"/>
               </a:lnSpc>
               <a:buNone/>
+              <a:tabLst>
+                <a:tab algn="l" pos="0"/>
+              </a:tabLst>
               <a:defRPr b="0" lang="en-US" sz="1200" spc="-1" strike="noStrike">
                 <a:solidFill>
                   <a:schemeClr val="dk1"/>
@@ -822,8 +874,11 @@
                 <a:spcPct val="100000"/>
               </a:lnSpc>
               <a:buNone/>
-            </a:pPr>
-            <a:fld id="{D4D4C1DC-9A44-459E-B0F4-05CF5C3E239D}" type="slidenum">
+              <a:tabLst>
+                <a:tab algn="l" pos="0"/>
+              </a:tabLst>
+            </a:pPr>
+            <a:fld id="{52FD53F5-C433-47D7-8B4F-2606FDCBC055}" type="slidenum">
               <a:rPr b="0" lang="en-US" sz="1200" spc="-1" strike="noStrike">
                 <a:solidFill>
                   <a:schemeClr val="dk1"/>
@@ -877,7 +932,7 @@
         <p:spPr>
           <a:xfrm>
             <a:off x="685800" y="1143000"/>
-            <a:ext cx="5486040" cy="3085920"/>
+            <a:ext cx="5485680" cy="3085560"/>
           </a:xfrm>
           <a:prstGeom prst="rect">
             <a:avLst/>
@@ -900,7 +955,7 @@
         <p:spPr>
           <a:xfrm>
             <a:off x="685800" y="4400640"/>
-            <a:ext cx="5486040" cy="3600000"/>
+            <a:ext cx="5485680" cy="3599640"/>
           </a:xfrm>
           <a:prstGeom prst="rect">
             <a:avLst/>
@@ -940,7 +995,7 @@
         <p:spPr>
           <a:xfrm>
             <a:off x="3884760" y="8685360"/>
-            <a:ext cx="2971440" cy="458280"/>
+            <a:ext cx="2971080" cy="457920"/>
           </a:xfrm>
           <a:prstGeom prst="rect">
             <a:avLst/>
@@ -960,6 +1015,9 @@
                 <a:spcPct val="100000"/>
               </a:lnSpc>
               <a:buNone/>
+              <a:tabLst>
+                <a:tab algn="l" pos="0"/>
+              </a:tabLst>
               <a:defRPr b="0" lang="en-US" sz="1200" spc="-1" strike="noStrike">
                 <a:solidFill>
                   <a:schemeClr val="dk1"/>
@@ -975,8 +1033,11 @@
                 <a:spcPct val="100000"/>
               </a:lnSpc>
               <a:buNone/>
-            </a:pPr>
-            <a:fld id="{160D168E-1E8F-42BA-8E35-E14D5CFB08AA}" type="slidenum">
+              <a:tabLst>
+                <a:tab algn="l" pos="0"/>
+              </a:tabLst>
+            </a:pPr>
+            <a:fld id="{7758C227-40D4-411A-8665-97D6A36C4A7F}" type="slidenum">
               <a:rPr b="0" lang="en-US" sz="1200" spc="-1" strike="noStrike">
                 <a:solidFill>
                   <a:schemeClr val="dk1"/>
@@ -1030,7 +1091,7 @@
         <p:spPr>
           <a:xfrm>
             <a:off x="685800" y="1143000"/>
-            <a:ext cx="5486040" cy="3085920"/>
+            <a:ext cx="5485680" cy="3085560"/>
           </a:xfrm>
           <a:prstGeom prst="rect">
             <a:avLst/>
@@ -1053,7 +1114,7 @@
         <p:spPr>
           <a:xfrm>
             <a:off x="685800" y="4400640"/>
-            <a:ext cx="5486040" cy="3600000"/>
+            <a:ext cx="5485680" cy="3599640"/>
           </a:xfrm>
           <a:prstGeom prst="rect">
             <a:avLst/>
@@ -1093,7 +1154,7 @@
         <p:spPr>
           <a:xfrm>
             <a:off x="3884760" y="8685360"/>
-            <a:ext cx="2971440" cy="458280"/>
+            <a:ext cx="2971080" cy="457920"/>
           </a:xfrm>
           <a:prstGeom prst="rect">
             <a:avLst/>
@@ -1113,6 +1174,9 @@
                 <a:spcPct val="100000"/>
               </a:lnSpc>
               <a:buNone/>
+              <a:tabLst>
+                <a:tab algn="l" pos="0"/>
+              </a:tabLst>
               <a:defRPr b="0" lang="en-US" sz="1200" spc="-1" strike="noStrike">
                 <a:solidFill>
                   <a:schemeClr val="dk1"/>
@@ -1128,8 +1192,11 @@
                 <a:spcPct val="100000"/>
               </a:lnSpc>
               <a:buNone/>
-            </a:pPr>
-            <a:fld id="{B7E31821-1BC9-4377-BA01-64FD3A6B256E}" type="slidenum">
+              <a:tabLst>
+                <a:tab algn="l" pos="0"/>
+              </a:tabLst>
+            </a:pPr>
+            <a:fld id="{F2C003E5-E7EC-4D4A-9038-F03CA7AF9735}" type="slidenum">
               <a:rPr b="0" lang="en-US" sz="1200" spc="-1" strike="noStrike">
                 <a:solidFill>
                   <a:schemeClr val="dk1"/>
@@ -1183,7 +1250,7 @@
         <p:spPr>
           <a:xfrm>
             <a:off x="685800" y="1143000"/>
-            <a:ext cx="5486040" cy="3085920"/>
+            <a:ext cx="5485680" cy="3085560"/>
           </a:xfrm>
           <a:prstGeom prst="rect">
             <a:avLst/>
@@ -1206,7 +1273,7 @@
         <p:spPr>
           <a:xfrm>
             <a:off x="685800" y="4400640"/>
-            <a:ext cx="5486040" cy="3600000"/>
+            <a:ext cx="5485680" cy="3599640"/>
           </a:xfrm>
           <a:prstGeom prst="rect">
             <a:avLst/>
@@ -1246,7 +1313,7 @@
         <p:spPr>
           <a:xfrm>
             <a:off x="3884760" y="8685360"/>
-            <a:ext cx="2971440" cy="458280"/>
+            <a:ext cx="2971080" cy="457920"/>
           </a:xfrm>
           <a:prstGeom prst="rect">
             <a:avLst/>
@@ -1266,6 +1333,9 @@
                 <a:spcPct val="100000"/>
               </a:lnSpc>
               <a:buNone/>
+              <a:tabLst>
+                <a:tab algn="l" pos="0"/>
+              </a:tabLst>
               <a:defRPr b="0" lang="en-US" sz="1200" spc="-1" strike="noStrike">
                 <a:solidFill>
                   <a:schemeClr val="dk1"/>
@@ -1281,8 +1351,11 @@
                 <a:spcPct val="100000"/>
               </a:lnSpc>
               <a:buNone/>
-            </a:pPr>
-            <a:fld id="{06E53EC8-A051-4791-9C60-AC0348B35D0A}" type="slidenum">
+              <a:tabLst>
+                <a:tab algn="l" pos="0"/>
+              </a:tabLst>
+            </a:pPr>
+            <a:fld id="{463ED030-6ED9-4063-9672-4B5EE342B50C}" type="slidenum">
               <a:rPr b="0" lang="en-US" sz="1200" spc="-1" strike="noStrike">
                 <a:solidFill>
                   <a:schemeClr val="dk1"/>
@@ -1336,7 +1409,7 @@
         <p:spPr>
           <a:xfrm>
             <a:off x="685800" y="1143000"/>
-            <a:ext cx="5486040" cy="3085920"/>
+            <a:ext cx="5485680" cy="3085560"/>
           </a:xfrm>
           <a:prstGeom prst="rect">
             <a:avLst/>
@@ -1359,7 +1432,7 @@
         <p:spPr>
           <a:xfrm>
             <a:off x="685800" y="4400640"/>
-            <a:ext cx="5486040" cy="3600000"/>
+            <a:ext cx="5485680" cy="3599640"/>
           </a:xfrm>
           <a:prstGeom prst="rect">
             <a:avLst/>
@@ -1399,7 +1472,7 @@
         <p:spPr>
           <a:xfrm>
             <a:off x="3884760" y="8685360"/>
-            <a:ext cx="2971440" cy="458280"/>
+            <a:ext cx="2971080" cy="457920"/>
           </a:xfrm>
           <a:prstGeom prst="rect">
             <a:avLst/>
@@ -1419,6 +1492,9 @@
                 <a:spcPct val="100000"/>
               </a:lnSpc>
               <a:buNone/>
+              <a:tabLst>
+                <a:tab algn="l" pos="0"/>
+              </a:tabLst>
               <a:defRPr b="0" lang="en-US" sz="1200" spc="-1" strike="noStrike">
                 <a:solidFill>
                   <a:schemeClr val="dk1"/>
@@ -1434,8 +1510,11 @@
                 <a:spcPct val="100000"/>
               </a:lnSpc>
               <a:buNone/>
-            </a:pPr>
-            <a:fld id="{8E22D34D-4008-4392-9054-7D17B8FA67B5}" type="slidenum">
+              <a:tabLst>
+                <a:tab algn="l" pos="0"/>
+              </a:tabLst>
+            </a:pPr>
+            <a:fld id="{D9AB6750-BCAB-43C9-BC28-5C8031205F87}" type="slidenum">
               <a:rPr b="0" lang="en-US" sz="1200" spc="-1" strike="noStrike">
                 <a:solidFill>
                   <a:schemeClr val="dk1"/>
@@ -1489,7 +1568,7 @@
         <p:spPr>
           <a:xfrm>
             <a:off x="685800" y="1143000"/>
-            <a:ext cx="5486040" cy="3085920"/>
+            <a:ext cx="5485680" cy="3085560"/>
           </a:xfrm>
           <a:prstGeom prst="rect">
             <a:avLst/>
@@ -1512,7 +1591,7 @@
         <p:spPr>
           <a:xfrm>
             <a:off x="685800" y="4400640"/>
-            <a:ext cx="5486040" cy="3600000"/>
+            <a:ext cx="5485680" cy="3599640"/>
           </a:xfrm>
           <a:prstGeom prst="rect">
             <a:avLst/>
@@ -1552,7 +1631,7 @@
         <p:spPr>
           <a:xfrm>
             <a:off x="3884760" y="8685360"/>
-            <a:ext cx="2971440" cy="458280"/>
+            <a:ext cx="2971080" cy="457920"/>
           </a:xfrm>
           <a:prstGeom prst="rect">
             <a:avLst/>
@@ -1572,6 +1651,9 @@
                 <a:spcPct val="100000"/>
               </a:lnSpc>
               <a:buNone/>
+              <a:tabLst>
+                <a:tab algn="l" pos="0"/>
+              </a:tabLst>
               <a:defRPr b="0" lang="en-US" sz="1200" spc="-1" strike="noStrike">
                 <a:solidFill>
                   <a:schemeClr val="dk1"/>
@@ -1587,8 +1669,11 @@
                 <a:spcPct val="100000"/>
               </a:lnSpc>
               <a:buNone/>
-            </a:pPr>
-            <a:fld id="{E12B5954-FBE8-4BDF-826B-65D77752ABBA}" type="slidenum">
+              <a:tabLst>
+                <a:tab algn="l" pos="0"/>
+              </a:tabLst>
+            </a:pPr>
+            <a:fld id="{DA84ACEC-117B-44C4-B100-D62A23C306AD}" type="slidenum">
               <a:rPr b="0" lang="en-US" sz="1200" spc="-1" strike="noStrike">
                 <a:solidFill>
                   <a:schemeClr val="dk1"/>
@@ -1642,7 +1727,7 @@
         <p:spPr>
           <a:xfrm>
             <a:off x="685800" y="1143000"/>
-            <a:ext cx="5486040" cy="3085920"/>
+            <a:ext cx="5485680" cy="3085560"/>
           </a:xfrm>
           <a:prstGeom prst="rect">
             <a:avLst/>
@@ -1665,7 +1750,7 @@
         <p:spPr>
           <a:xfrm>
             <a:off x="685800" y="4400640"/>
-            <a:ext cx="5486040" cy="3600000"/>
+            <a:ext cx="5485680" cy="3599640"/>
           </a:xfrm>
           <a:prstGeom prst="rect">
             <a:avLst/>
@@ -1705,7 +1790,7 @@
         <p:spPr>
           <a:xfrm>
             <a:off x="3884760" y="8685360"/>
-            <a:ext cx="2971440" cy="458280"/>
+            <a:ext cx="2971080" cy="457920"/>
           </a:xfrm>
           <a:prstGeom prst="rect">
             <a:avLst/>
@@ -1725,6 +1810,9 @@
                 <a:spcPct val="100000"/>
               </a:lnSpc>
               <a:buNone/>
+              <a:tabLst>
+                <a:tab algn="l" pos="0"/>
+              </a:tabLst>
               <a:defRPr b="0" lang="en-US" sz="1200" spc="-1" strike="noStrike">
                 <a:solidFill>
                   <a:schemeClr val="dk1"/>
@@ -1740,8 +1828,11 @@
                 <a:spcPct val="100000"/>
               </a:lnSpc>
               <a:buNone/>
-            </a:pPr>
-            <a:fld id="{3EAA11C8-5D12-4FD3-9835-29B96F29A6B4}" type="slidenum">
+              <a:tabLst>
+                <a:tab algn="l" pos="0"/>
+              </a:tabLst>
+            </a:pPr>
+            <a:fld id="{7B02156F-55B5-4F59-99EA-4AE1020514C4}" type="slidenum">
               <a:rPr b="0" lang="en-US" sz="1200" spc="-1" strike="noStrike">
                 <a:solidFill>
                   <a:schemeClr val="dk1"/>
@@ -1839,32 +1930,50 @@
             <a:noAutofit/>
           </a:bodyPr>
           <a:p>
-            <a:pPr indent="0">
+            <a:pPr indent="0" algn="ctr">
               <a:buNone/>
             </a:pPr>
             <a:r>
-              <a:rPr b="0" lang="en-US" sz="1800" spc="-1" strike="noStrike">
+              <a:rPr b="0" lang="en-US" sz="4400" spc="-1" strike="noStrike">
                 <a:solidFill>
-                  <a:schemeClr val="dk1"/>
+                  <a:srgbClr val="000000"/>
                 </a:solidFill>
-                <a:latin typeface="Calibri"/>
+                <a:latin typeface="Arial"/>
               </a:rPr>
-              <a:t>Click to edit the </a:t>
+              <a:t>Click to </a:t>
             </a:r>
             <a:r>
-              <a:rPr b="0" lang="en-US" sz="1800" spc="-1" strike="noStrike">
+              <a:rPr b="0" lang="en-US" sz="4400" spc="-1" strike="noStrike">
                 <a:solidFill>
-                  <a:schemeClr val="dk1"/>
+                  <a:srgbClr val="000000"/>
                 </a:solidFill>
-                <a:latin typeface="Calibri"/>
+                <a:latin typeface="Arial"/>
               </a:rPr>
-              <a:t>title text format</a:t>
+              <a:t>edit the </a:t>
             </a:r>
-            <a:endParaRPr b="0" lang="en-US" sz="1800" spc="-1" strike="noStrike">
-              <a:solidFill>
-                <a:schemeClr val="dk1"/>
-              </a:solidFill>
-              <a:latin typeface="Calibri"/>
+            <a:r>
+              <a:rPr b="0" lang="en-US" sz="4400" spc="-1" strike="noStrike">
+                <a:solidFill>
+                  <a:srgbClr val="000000"/>
+                </a:solidFill>
+                <a:latin typeface="Arial"/>
+              </a:rPr>
+              <a:t>title text </a:t>
+            </a:r>
+            <a:r>
+              <a:rPr b="0" lang="en-US" sz="4400" spc="-1" strike="noStrike">
+                <a:solidFill>
+                  <a:srgbClr val="000000"/>
+                </a:solidFill>
+                <a:latin typeface="Arial"/>
+              </a:rPr>
+              <a:t>format</a:t>
+            </a:r>
+            <a:endParaRPr b="0" lang="en-US" sz="4400" spc="-1" strike="noStrike">
+              <a:solidFill>
+                <a:srgbClr val="000000"/>
+              </a:solidFill>
+              <a:latin typeface="Arial"/>
             </a:endParaRPr>
           </a:p>
         </p:txBody>
@@ -1894,7 +2003,7 @@
         </p:spPr>
         <p:txBody>
           <a:bodyPr lIns="0" rIns="0" tIns="0" bIns="0" anchor="t">
-            <a:normAutofit fontScale="95303"/>
+            <a:normAutofit/>
           </a:bodyPr>
           <a:p>
             <a:pPr marL="432000" indent="-324000">
@@ -1911,17 +2020,17 @@
             <a:r>
               <a:rPr b="0" lang="en-US" sz="3200" spc="-1" strike="noStrike">
                 <a:solidFill>
-                  <a:schemeClr val="dk1"/>
+                  <a:srgbClr val="000000"/>
                 </a:solidFill>
-                <a:latin typeface="Calibri"/>
+                <a:latin typeface="Arial"/>
               </a:rPr>
               <a:t>Click to edit the outline text format</a:t>
             </a:r>
             <a:endParaRPr b="0" lang="en-US" sz="3200" spc="-1" strike="noStrike">
               <a:solidFill>
-                <a:schemeClr val="dk1"/>
-              </a:solidFill>
-              <a:latin typeface="Calibri"/>
+                <a:srgbClr val="000000"/>
+              </a:solidFill>
+              <a:latin typeface="Arial"/>
             </a:endParaRPr>
           </a:p>
           <a:p>
@@ -1937,19 +2046,19 @@
               <a:buChar char=""/>
             </a:pPr>
             <a:r>
-              <a:rPr b="0" lang="en-US" sz="2400" spc="-1" strike="noStrike">
+              <a:rPr b="0" lang="en-US" sz="2800" spc="-1" strike="noStrike">
                 <a:solidFill>
-                  <a:schemeClr val="dk1"/>
+                  <a:srgbClr val="000000"/>
                 </a:solidFill>
-                <a:latin typeface="Calibri"/>
+                <a:latin typeface="Arial"/>
               </a:rPr>
               <a:t>Second Outline Level</a:t>
             </a:r>
-            <a:endParaRPr b="0" lang="en-US" sz="2400" spc="-1" strike="noStrike">
-              <a:solidFill>
-                <a:schemeClr val="dk1"/>
-              </a:solidFill>
-              <a:latin typeface="Calibri"/>
+            <a:endParaRPr b="0" lang="en-US" sz="2800" spc="-1" strike="noStrike">
+              <a:solidFill>
+                <a:srgbClr val="000000"/>
+              </a:solidFill>
+              <a:latin typeface="Arial"/>
             </a:endParaRPr>
           </a:p>
           <a:p>
@@ -1965,19 +2074,19 @@
               <a:buChar char=""/>
             </a:pPr>
             <a:r>
-              <a:rPr b="0" lang="en-US" sz="2000" spc="-1" strike="noStrike">
+              <a:rPr b="0" lang="en-US" sz="2400" spc="-1" strike="noStrike">
                 <a:solidFill>
-                  <a:schemeClr val="dk1"/>
+                  <a:srgbClr val="000000"/>
                 </a:solidFill>
-                <a:latin typeface="Calibri"/>
+                <a:latin typeface="Arial"/>
               </a:rPr>
               <a:t>Third Outline Level</a:t>
             </a:r>
-            <a:endParaRPr b="0" lang="en-US" sz="2000" spc="-1" strike="noStrike">
-              <a:solidFill>
-                <a:schemeClr val="dk1"/>
-              </a:solidFill>
-              <a:latin typeface="Calibri"/>
+            <a:endParaRPr b="0" lang="en-US" sz="2400" spc="-1" strike="noStrike">
+              <a:solidFill>
+                <a:srgbClr val="000000"/>
+              </a:solidFill>
+              <a:latin typeface="Arial"/>
             </a:endParaRPr>
           </a:p>
           <a:p>
@@ -1995,17 +2104,17 @@
             <a:r>
               <a:rPr b="0" lang="en-US" sz="2000" spc="-1" strike="noStrike">
                 <a:solidFill>
-                  <a:schemeClr val="dk1"/>
+                  <a:srgbClr val="000000"/>
                 </a:solidFill>
-                <a:latin typeface="Calibri"/>
+                <a:latin typeface="Arial"/>
               </a:rPr>
               <a:t>Fourth Outline Level</a:t>
             </a:r>
             <a:endParaRPr b="0" lang="en-US" sz="2000" spc="-1" strike="noStrike">
               <a:solidFill>
-                <a:schemeClr val="dk1"/>
-              </a:solidFill>
-              <a:latin typeface="Calibri"/>
+                <a:srgbClr val="000000"/>
+              </a:solidFill>
+              <a:latin typeface="Arial"/>
             </a:endParaRPr>
           </a:p>
           <a:p>
@@ -2023,17 +2132,17 @@
             <a:r>
               <a:rPr b="0" lang="en-US" sz="2000" spc="-1" strike="noStrike">
                 <a:solidFill>
-                  <a:schemeClr val="dk1"/>
+                  <a:srgbClr val="000000"/>
                 </a:solidFill>
-                <a:latin typeface="Calibri"/>
+                <a:latin typeface="Arial"/>
               </a:rPr>
               <a:t>Fifth Outline Level</a:t>
             </a:r>
             <a:endParaRPr b="0" lang="en-US" sz="2000" spc="-1" strike="noStrike">
               <a:solidFill>
-                <a:schemeClr val="dk1"/>
-              </a:solidFill>
-              <a:latin typeface="Calibri"/>
+                <a:srgbClr val="000000"/>
+              </a:solidFill>
+              <a:latin typeface="Arial"/>
             </a:endParaRPr>
           </a:p>
           <a:p>
@@ -2051,17 +2160,17 @@
             <a:r>
               <a:rPr b="0" lang="en-US" sz="2000" spc="-1" strike="noStrike">
                 <a:solidFill>
-                  <a:schemeClr val="dk1"/>
+                  <a:srgbClr val="000000"/>
                 </a:solidFill>
-                <a:latin typeface="Calibri"/>
+                <a:latin typeface="Arial"/>
               </a:rPr>
               <a:t>Sixth Outline Level</a:t>
             </a:r>
             <a:endParaRPr b="0" lang="en-US" sz="2000" spc="-1" strike="noStrike">
               <a:solidFill>
-                <a:schemeClr val="dk1"/>
-              </a:solidFill>
-              <a:latin typeface="Calibri"/>
+                <a:srgbClr val="000000"/>
+              </a:solidFill>
+              <a:latin typeface="Arial"/>
             </a:endParaRPr>
           </a:p>
           <a:p>
@@ -2079,17 +2188,17 @@
             <a:r>
               <a:rPr b="0" lang="en-US" sz="2000" spc="-1" strike="noStrike">
                 <a:solidFill>
-                  <a:schemeClr val="dk1"/>
+                  <a:srgbClr val="000000"/>
                 </a:solidFill>
-                <a:latin typeface="Calibri"/>
+                <a:latin typeface="Arial"/>
               </a:rPr>
               <a:t>Seventh Outline Level</a:t>
             </a:r>
             <a:endParaRPr b="0" lang="en-US" sz="2000" spc="-1" strike="noStrike">
               <a:solidFill>
-                <a:schemeClr val="dk1"/>
-              </a:solidFill>
-              <a:latin typeface="Calibri"/>
+                <a:srgbClr val="000000"/>
+              </a:solidFill>
+              <a:latin typeface="Arial"/>
             </a:endParaRPr>
           </a:p>
         </p:txBody>
@@ -2136,7 +2245,7 @@
         <p:spPr>
           <a:xfrm>
             <a:off x="0" y="0"/>
-            <a:ext cx="109440" cy="5143320"/>
+            <a:ext cx="109080" cy="5142960"/>
           </a:xfrm>
           <a:prstGeom prst="rect">
             <a:avLst/>
@@ -2162,6 +2271,11 @@
             <a:noAutofit/>
           </a:bodyPr>
           <a:p>
+            <a:pPr>
+              <a:lnSpc>
+                <a:spcPct val="100000"/>
+              </a:lnSpc>
+            </a:pPr>
             <a:endParaRPr b="0" lang="en-US" sz="1800" spc="-1" strike="noStrike">
               <a:solidFill>
                 <a:srgbClr val="ffffff"/>
@@ -2180,7 +2294,7 @@
         <p:spPr>
           <a:xfrm>
             <a:off x="6217920" y="457200"/>
-            <a:ext cx="82080" cy="82080"/>
+            <a:ext cx="81720" cy="81720"/>
           </a:xfrm>
           <a:prstGeom prst="ellipse">
             <a:avLst/>
@@ -2208,6 +2322,11 @@
             <a:noAutofit/>
           </a:bodyPr>
           <a:p>
+            <a:pPr>
+              <a:lnSpc>
+                <a:spcPct val="100000"/>
+              </a:lnSpc>
+            </a:pPr>
             <a:endParaRPr b="0" lang="en-US" sz="1800" spc="-1" strike="noStrike">
               <a:solidFill>
                 <a:srgbClr val="ffffff"/>
@@ -2226,7 +2345,7 @@
         <p:spPr>
           <a:xfrm>
             <a:off x="6720840" y="457200"/>
-            <a:ext cx="82080" cy="82080"/>
+            <a:ext cx="81720" cy="81720"/>
           </a:xfrm>
           <a:prstGeom prst="ellipse">
             <a:avLst/>
@@ -2254,6 +2373,11 @@
             <a:noAutofit/>
           </a:bodyPr>
           <a:p>
+            <a:pPr>
+              <a:lnSpc>
+                <a:spcPct val="100000"/>
+              </a:lnSpc>
+            </a:pPr>
             <a:endParaRPr b="0" lang="en-US" sz="1800" spc="-1" strike="noStrike">
               <a:solidFill>
                 <a:srgbClr val="ffffff"/>
@@ -2272,7 +2396,7 @@
         <p:spPr>
           <a:xfrm>
             <a:off x="7223760" y="457200"/>
-            <a:ext cx="82080" cy="82080"/>
+            <a:ext cx="81720" cy="81720"/>
           </a:xfrm>
           <a:prstGeom prst="ellipse">
             <a:avLst/>
@@ -2300,6 +2424,11 @@
             <a:noAutofit/>
           </a:bodyPr>
           <a:p>
+            <a:pPr>
+              <a:lnSpc>
+                <a:spcPct val="100000"/>
+              </a:lnSpc>
+            </a:pPr>
             <a:endParaRPr b="0" lang="en-US" sz="1800" spc="-1" strike="noStrike">
               <a:solidFill>
                 <a:srgbClr val="ffffff"/>
@@ -2318,7 +2447,7 @@
         <p:spPr>
           <a:xfrm>
             <a:off x="7726680" y="457200"/>
-            <a:ext cx="82080" cy="82080"/>
+            <a:ext cx="81720" cy="81720"/>
           </a:xfrm>
           <a:prstGeom prst="ellipse">
             <a:avLst/>
@@ -2346,6 +2475,11 @@
             <a:noAutofit/>
           </a:bodyPr>
           <a:p>
+            <a:pPr>
+              <a:lnSpc>
+                <a:spcPct val="100000"/>
+              </a:lnSpc>
+            </a:pPr>
             <a:endParaRPr b="0" lang="en-US" sz="1800" spc="-1" strike="noStrike">
               <a:solidFill>
                 <a:srgbClr val="ffffff"/>
@@ -2364,7 +2498,7 @@
         <p:spPr>
           <a:xfrm>
             <a:off x="8229600" y="457200"/>
-            <a:ext cx="82080" cy="82080"/>
+            <a:ext cx="81720" cy="81720"/>
           </a:xfrm>
           <a:prstGeom prst="ellipse">
             <a:avLst/>
@@ -2392,6 +2526,11 @@
             <a:noAutofit/>
           </a:bodyPr>
           <a:p>
+            <a:pPr>
+              <a:lnSpc>
+                <a:spcPct val="100000"/>
+              </a:lnSpc>
+            </a:pPr>
             <a:endParaRPr b="0" lang="en-US" sz="1800" spc="-1" strike="noStrike">
               <a:solidFill>
                 <a:srgbClr val="ffffff"/>
@@ -2410,7 +2549,7 @@
         <p:spPr>
           <a:xfrm>
             <a:off x="8732520" y="457200"/>
-            <a:ext cx="82080" cy="82080"/>
+            <a:ext cx="81720" cy="81720"/>
           </a:xfrm>
           <a:prstGeom prst="ellipse">
             <a:avLst/>
@@ -2438,6 +2577,11 @@
             <a:noAutofit/>
           </a:bodyPr>
           <a:p>
+            <a:pPr>
+              <a:lnSpc>
+                <a:spcPct val="100000"/>
+              </a:lnSpc>
+            </a:pPr>
             <a:endParaRPr b="0" lang="en-US" sz="1800" spc="-1" strike="noStrike">
               <a:solidFill>
                 <a:srgbClr val="ffffff"/>
@@ -2456,7 +2600,7 @@
         <p:spPr>
           <a:xfrm>
             <a:off x="6217920" y="960120"/>
-            <a:ext cx="82080" cy="82080"/>
+            <a:ext cx="81720" cy="81720"/>
           </a:xfrm>
           <a:prstGeom prst="ellipse">
             <a:avLst/>
@@ -2484,6 +2628,11 @@
             <a:noAutofit/>
           </a:bodyPr>
           <a:p>
+            <a:pPr>
+              <a:lnSpc>
+                <a:spcPct val="100000"/>
+              </a:lnSpc>
+            </a:pPr>
             <a:endParaRPr b="0" lang="en-US" sz="1800" spc="-1" strike="noStrike">
               <a:solidFill>
                 <a:srgbClr val="ffffff"/>
@@ -2502,7 +2651,7 @@
         <p:spPr>
           <a:xfrm>
             <a:off x="6720840" y="960120"/>
-            <a:ext cx="82080" cy="82080"/>
+            <a:ext cx="81720" cy="81720"/>
           </a:xfrm>
           <a:prstGeom prst="ellipse">
             <a:avLst/>
@@ -2530,6 +2679,11 @@
             <a:noAutofit/>
           </a:bodyPr>
           <a:p>
+            <a:pPr>
+              <a:lnSpc>
+                <a:spcPct val="100000"/>
+              </a:lnSpc>
+            </a:pPr>
             <a:endParaRPr b="0" lang="en-US" sz="1800" spc="-1" strike="noStrike">
               <a:solidFill>
                 <a:srgbClr val="ffffff"/>
@@ -2548,7 +2702,7 @@
         <p:spPr>
           <a:xfrm>
             <a:off x="7223760" y="960120"/>
-            <a:ext cx="82080" cy="82080"/>
+            <a:ext cx="81720" cy="81720"/>
           </a:xfrm>
           <a:prstGeom prst="ellipse">
             <a:avLst/>
@@ -2576,6 +2730,11 @@
             <a:noAutofit/>
           </a:bodyPr>
           <a:p>
+            <a:pPr>
+              <a:lnSpc>
+                <a:spcPct val="100000"/>
+              </a:lnSpc>
+            </a:pPr>
             <a:endParaRPr b="0" lang="en-US" sz="1800" spc="-1" strike="noStrike">
               <a:solidFill>
                 <a:srgbClr val="ffffff"/>
@@ -2594,7 +2753,7 @@
         <p:spPr>
           <a:xfrm>
             <a:off x="7726680" y="960120"/>
-            <a:ext cx="82080" cy="82080"/>
+            <a:ext cx="81720" cy="81720"/>
           </a:xfrm>
           <a:prstGeom prst="ellipse">
             <a:avLst/>
@@ -2622,6 +2781,11 @@
             <a:noAutofit/>
           </a:bodyPr>
           <a:p>
+            <a:pPr>
+              <a:lnSpc>
+                <a:spcPct val="100000"/>
+              </a:lnSpc>
+            </a:pPr>
             <a:endParaRPr b="0" lang="en-US" sz="1800" spc="-1" strike="noStrike">
               <a:solidFill>
                 <a:srgbClr val="ffffff"/>
@@ -2640,7 +2804,7 @@
         <p:spPr>
           <a:xfrm>
             <a:off x="8229600" y="960120"/>
-            <a:ext cx="82080" cy="82080"/>
+            <a:ext cx="81720" cy="81720"/>
           </a:xfrm>
           <a:prstGeom prst="ellipse">
             <a:avLst/>
@@ -2668,6 +2832,11 @@
             <a:noAutofit/>
           </a:bodyPr>
           <a:p>
+            <a:pPr>
+              <a:lnSpc>
+                <a:spcPct val="100000"/>
+              </a:lnSpc>
+            </a:pPr>
             <a:endParaRPr b="0" lang="en-US" sz="1800" spc="-1" strike="noStrike">
               <a:solidFill>
                 <a:srgbClr val="ffffff"/>
@@ -2686,7 +2855,7 @@
         <p:spPr>
           <a:xfrm>
             <a:off x="8732520" y="960120"/>
-            <a:ext cx="82080" cy="82080"/>
+            <a:ext cx="81720" cy="81720"/>
           </a:xfrm>
           <a:prstGeom prst="ellipse">
             <a:avLst/>
@@ -2714,6 +2883,11 @@
             <a:noAutofit/>
           </a:bodyPr>
           <a:p>
+            <a:pPr>
+              <a:lnSpc>
+                <a:spcPct val="100000"/>
+              </a:lnSpc>
+            </a:pPr>
             <a:endParaRPr b="0" lang="en-US" sz="1800" spc="-1" strike="noStrike">
               <a:solidFill>
                 <a:srgbClr val="ffffff"/>
@@ -2732,7 +2906,7 @@
         <p:spPr>
           <a:xfrm>
             <a:off x="6217920" y="1463040"/>
-            <a:ext cx="82080" cy="82080"/>
+            <a:ext cx="81720" cy="81720"/>
           </a:xfrm>
           <a:prstGeom prst="ellipse">
             <a:avLst/>
@@ -2760,6 +2934,11 @@
             <a:noAutofit/>
           </a:bodyPr>
           <a:p>
+            <a:pPr>
+              <a:lnSpc>
+                <a:spcPct val="100000"/>
+              </a:lnSpc>
+            </a:pPr>
             <a:endParaRPr b="0" lang="en-US" sz="1800" spc="-1" strike="noStrike">
               <a:solidFill>
                 <a:srgbClr val="ffffff"/>
@@ -2778,7 +2957,7 @@
         <p:spPr>
           <a:xfrm>
             <a:off x="6720840" y="1463040"/>
-            <a:ext cx="82080" cy="82080"/>
+            <a:ext cx="81720" cy="81720"/>
           </a:xfrm>
           <a:prstGeom prst="ellipse">
             <a:avLst/>
@@ -2806,6 +2985,11 @@
             <a:noAutofit/>
           </a:bodyPr>
           <a:p>
+            <a:pPr>
+              <a:lnSpc>
+                <a:spcPct val="100000"/>
+              </a:lnSpc>
+            </a:pPr>
             <a:endParaRPr b="0" lang="en-US" sz="1800" spc="-1" strike="noStrike">
               <a:solidFill>
                 <a:srgbClr val="ffffff"/>
@@ -2824,7 +3008,7 @@
         <p:spPr>
           <a:xfrm>
             <a:off x="7223760" y="1463040"/>
-            <a:ext cx="82080" cy="82080"/>
+            <a:ext cx="81720" cy="81720"/>
           </a:xfrm>
           <a:prstGeom prst="ellipse">
             <a:avLst/>
@@ -2852,6 +3036,11 @@
             <a:noAutofit/>
           </a:bodyPr>
           <a:p>
+            <a:pPr>
+              <a:lnSpc>
+                <a:spcPct val="100000"/>
+              </a:lnSpc>
+            </a:pPr>
             <a:endParaRPr b="0" lang="en-US" sz="1800" spc="-1" strike="noStrike">
               <a:solidFill>
                 <a:srgbClr val="ffffff"/>
@@ -2870,7 +3059,7 @@
         <p:spPr>
           <a:xfrm>
             <a:off x="7726680" y="1463040"/>
-            <a:ext cx="82080" cy="82080"/>
+            <a:ext cx="81720" cy="81720"/>
           </a:xfrm>
           <a:prstGeom prst="ellipse">
             <a:avLst/>
@@ -2898,6 +3087,11 @@
             <a:noAutofit/>
           </a:bodyPr>
           <a:p>
+            <a:pPr>
+              <a:lnSpc>
+                <a:spcPct val="100000"/>
+              </a:lnSpc>
+            </a:pPr>
             <a:endParaRPr b="0" lang="en-US" sz="1800" spc="-1" strike="noStrike">
               <a:solidFill>
                 <a:srgbClr val="ffffff"/>
@@ -2916,7 +3110,7 @@
         <p:spPr>
           <a:xfrm>
             <a:off x="8229600" y="1463040"/>
-            <a:ext cx="82080" cy="82080"/>
+            <a:ext cx="81720" cy="81720"/>
           </a:xfrm>
           <a:prstGeom prst="ellipse">
             <a:avLst/>
@@ -2944,6 +3138,11 @@
             <a:noAutofit/>
           </a:bodyPr>
           <a:p>
+            <a:pPr>
+              <a:lnSpc>
+                <a:spcPct val="100000"/>
+              </a:lnSpc>
+            </a:pPr>
             <a:endParaRPr b="0" lang="en-US" sz="1800" spc="-1" strike="noStrike">
               <a:solidFill>
                 <a:srgbClr val="ffffff"/>
@@ -2962,7 +3161,7 @@
         <p:spPr>
           <a:xfrm>
             <a:off x="8732520" y="1463040"/>
-            <a:ext cx="82080" cy="82080"/>
+            <a:ext cx="81720" cy="81720"/>
           </a:xfrm>
           <a:prstGeom prst="ellipse">
             <a:avLst/>
@@ -2990,6 +3189,11 @@
             <a:noAutofit/>
           </a:bodyPr>
           <a:p>
+            <a:pPr>
+              <a:lnSpc>
+                <a:spcPct val="100000"/>
+              </a:lnSpc>
+            </a:pPr>
             <a:endParaRPr b="0" lang="en-US" sz="1800" spc="-1" strike="noStrike">
               <a:solidFill>
                 <a:srgbClr val="ffffff"/>
@@ -3008,7 +3212,7 @@
         <p:spPr>
           <a:xfrm>
             <a:off x="6217920" y="1965960"/>
-            <a:ext cx="82080" cy="82080"/>
+            <a:ext cx="81720" cy="81720"/>
           </a:xfrm>
           <a:prstGeom prst="ellipse">
             <a:avLst/>
@@ -3036,6 +3240,11 @@
             <a:noAutofit/>
           </a:bodyPr>
           <a:p>
+            <a:pPr>
+              <a:lnSpc>
+                <a:spcPct val="100000"/>
+              </a:lnSpc>
+            </a:pPr>
             <a:endParaRPr b="0" lang="en-US" sz="1800" spc="-1" strike="noStrike">
               <a:solidFill>
                 <a:srgbClr val="ffffff"/>
@@ -3054,7 +3263,7 @@
         <p:spPr>
           <a:xfrm>
             <a:off x="6720840" y="1965960"/>
-            <a:ext cx="82080" cy="82080"/>
+            <a:ext cx="81720" cy="81720"/>
           </a:xfrm>
           <a:prstGeom prst="ellipse">
             <a:avLst/>
@@ -3082,6 +3291,11 @@
             <a:noAutofit/>
           </a:bodyPr>
           <a:p>
+            <a:pPr>
+              <a:lnSpc>
+                <a:spcPct val="100000"/>
+              </a:lnSpc>
+            </a:pPr>
             <a:endParaRPr b="0" lang="en-US" sz="1800" spc="-1" strike="noStrike">
               <a:solidFill>
                 <a:srgbClr val="ffffff"/>
@@ -3100,7 +3314,7 @@
         <p:spPr>
           <a:xfrm>
             <a:off x="7223760" y="1965960"/>
-            <a:ext cx="82080" cy="82080"/>
+            <a:ext cx="81720" cy="81720"/>
           </a:xfrm>
           <a:prstGeom prst="ellipse">
             <a:avLst/>
@@ -3128,6 +3342,11 @@
             <a:noAutofit/>
           </a:bodyPr>
           <a:p>
+            <a:pPr>
+              <a:lnSpc>
+                <a:spcPct val="100000"/>
+              </a:lnSpc>
+            </a:pPr>
             <a:endParaRPr b="0" lang="en-US" sz="1800" spc="-1" strike="noStrike">
               <a:solidFill>
                 <a:srgbClr val="ffffff"/>
@@ -3146,7 +3365,7 @@
         <p:spPr>
           <a:xfrm>
             <a:off x="7726680" y="1965960"/>
-            <a:ext cx="82080" cy="82080"/>
+            <a:ext cx="81720" cy="81720"/>
           </a:xfrm>
           <a:prstGeom prst="ellipse">
             <a:avLst/>
@@ -3174,6 +3393,11 @@
             <a:noAutofit/>
           </a:bodyPr>
           <a:p>
+            <a:pPr>
+              <a:lnSpc>
+                <a:spcPct val="100000"/>
+              </a:lnSpc>
+            </a:pPr>
             <a:endParaRPr b="0" lang="en-US" sz="1800" spc="-1" strike="noStrike">
               <a:solidFill>
                 <a:srgbClr val="ffffff"/>
@@ -3192,7 +3416,7 @@
         <p:spPr>
           <a:xfrm>
             <a:off x="8229600" y="1965960"/>
-            <a:ext cx="82080" cy="82080"/>
+            <a:ext cx="81720" cy="81720"/>
           </a:xfrm>
           <a:prstGeom prst="ellipse">
             <a:avLst/>
@@ -3220,6 +3444,11 @@
             <a:noAutofit/>
           </a:bodyPr>
           <a:p>
+            <a:pPr>
+              <a:lnSpc>
+                <a:spcPct val="100000"/>
+              </a:lnSpc>
+            </a:pPr>
             <a:endParaRPr b="0" lang="en-US" sz="1800" spc="-1" strike="noStrike">
               <a:solidFill>
                 <a:srgbClr val="ffffff"/>
@@ -3238,7 +3467,7 @@
         <p:spPr>
           <a:xfrm>
             <a:off x="8732520" y="1965960"/>
-            <a:ext cx="82080" cy="82080"/>
+            <a:ext cx="81720" cy="81720"/>
           </a:xfrm>
           <a:prstGeom prst="ellipse">
             <a:avLst/>
@@ -3266,6 +3495,11 @@
             <a:noAutofit/>
           </a:bodyPr>
           <a:p>
+            <a:pPr>
+              <a:lnSpc>
+                <a:spcPct val="100000"/>
+              </a:lnSpc>
+            </a:pPr>
             <a:endParaRPr b="0" lang="en-US" sz="1800" spc="-1" strike="noStrike">
               <a:solidFill>
                 <a:srgbClr val="ffffff"/>
@@ -3284,7 +3518,7 @@
         <p:spPr>
           <a:xfrm>
             <a:off x="365760" y="914400"/>
-            <a:ext cx="6400440" cy="1188360"/>
+            <a:ext cx="6400080" cy="1188000"/>
           </a:xfrm>
           <a:prstGeom prst="rect">
             <a:avLst/>
@@ -3341,7 +3575,7 @@
         <p:spPr>
           <a:xfrm>
             <a:off x="365760" y="1920240"/>
-            <a:ext cx="7314840" cy="639720"/>
+            <a:ext cx="7314480" cy="639360"/>
           </a:xfrm>
           <a:prstGeom prst="rect">
             <a:avLst/>
@@ -3398,7 +3632,7 @@
         <p:spPr>
           <a:xfrm>
             <a:off x="365760" y="2788920"/>
-            <a:ext cx="4754520" cy="54360"/>
+            <a:ext cx="4754160" cy="54000"/>
           </a:xfrm>
           <a:prstGeom prst="rect">
             <a:avLst/>
@@ -3424,6 +3658,11 @@
             <a:noAutofit/>
           </a:bodyPr>
           <a:p>
+            <a:pPr>
+              <a:lnSpc>
+                <a:spcPct val="100000"/>
+              </a:lnSpc>
+            </a:pPr>
             <a:endParaRPr b="0" lang="en-US" sz="1800" spc="-1" strike="noStrike">
               <a:solidFill>
                 <a:srgbClr val="ffffff"/>
@@ -3442,7 +3681,7 @@
         <p:spPr>
           <a:xfrm>
             <a:off x="365760" y="2971800"/>
-            <a:ext cx="6400440" cy="411120"/>
+            <a:ext cx="6400080" cy="410760"/>
           </a:xfrm>
           <a:prstGeom prst="rect">
             <a:avLst/>
@@ -3499,7 +3738,7 @@
         <p:spPr>
           <a:xfrm>
             <a:off x="365760" y="3840480"/>
-            <a:ext cx="2102760" cy="319680"/>
+            <a:ext cx="2102400" cy="319320"/>
           </a:xfrm>
           <a:prstGeom prst="rect">
             <a:avLst/>
@@ -3525,6 +3764,11 @@
             <a:noAutofit/>
           </a:bodyPr>
           <a:p>
+            <a:pPr>
+              <a:lnSpc>
+                <a:spcPct val="100000"/>
+              </a:lnSpc>
+            </a:pPr>
             <a:endParaRPr b="0" lang="en-US" sz="1800" spc="-1" strike="noStrike">
               <a:solidFill>
                 <a:srgbClr val="ffffff"/>
@@ -3543,7 +3787,7 @@
         <p:spPr>
           <a:xfrm>
             <a:off x="365760" y="3840480"/>
-            <a:ext cx="2102760" cy="319680"/>
+            <a:ext cx="2102400" cy="319320"/>
           </a:xfrm>
           <a:prstGeom prst="rect">
             <a:avLst/>
@@ -3599,7 +3843,7 @@
         <p:spPr>
           <a:xfrm>
             <a:off x="2743200" y="3840480"/>
-            <a:ext cx="2102760" cy="319680"/>
+            <a:ext cx="2102400" cy="319320"/>
           </a:xfrm>
           <a:prstGeom prst="rect">
             <a:avLst/>
@@ -3625,6 +3869,11 @@
             <a:noAutofit/>
           </a:bodyPr>
           <a:p>
+            <a:pPr>
+              <a:lnSpc>
+                <a:spcPct val="100000"/>
+              </a:lnSpc>
+            </a:pPr>
             <a:endParaRPr b="0" lang="en-US" sz="1800" spc="-1" strike="noStrike">
               <a:solidFill>
                 <a:srgbClr val="ffffff"/>
@@ -3643,7 +3892,7 @@
         <p:spPr>
           <a:xfrm>
             <a:off x="2743200" y="3840480"/>
-            <a:ext cx="2102760" cy="319680"/>
+            <a:ext cx="2102400" cy="319320"/>
           </a:xfrm>
           <a:prstGeom prst="rect">
             <a:avLst/>
@@ -3699,7 +3948,7 @@
         <p:spPr>
           <a:xfrm>
             <a:off x="5120640" y="3840480"/>
-            <a:ext cx="2102760" cy="319680"/>
+            <a:ext cx="2102400" cy="319320"/>
           </a:xfrm>
           <a:prstGeom prst="rect">
             <a:avLst/>
@@ -3725,6 +3974,11 @@
             <a:noAutofit/>
           </a:bodyPr>
           <a:p>
+            <a:pPr>
+              <a:lnSpc>
+                <a:spcPct val="100000"/>
+              </a:lnSpc>
+            </a:pPr>
             <a:endParaRPr b="0" lang="en-US" sz="1800" spc="-1" strike="noStrike">
               <a:solidFill>
                 <a:srgbClr val="ffffff"/>
@@ -3743,7 +3997,7 @@
         <p:spPr>
           <a:xfrm>
             <a:off x="5120640" y="3840480"/>
-            <a:ext cx="2102760" cy="319680"/>
+            <a:ext cx="2102400" cy="319320"/>
           </a:xfrm>
           <a:prstGeom prst="rect">
             <a:avLst/>
@@ -3799,7 +4053,7 @@
         <p:spPr>
           <a:xfrm>
             <a:off x="365760" y="4754880"/>
-            <a:ext cx="8229240" cy="228240"/>
+            <a:ext cx="8228880" cy="227880"/>
           </a:xfrm>
           <a:prstGeom prst="rect">
             <a:avLst/>
@@ -3883,7 +4137,7 @@
         <p:spPr>
           <a:xfrm>
             <a:off x="0" y="0"/>
-            <a:ext cx="9143640" cy="594000"/>
+            <a:ext cx="9143280" cy="593640"/>
           </a:xfrm>
           <a:prstGeom prst="rect">
             <a:avLst/>
@@ -3909,6 +4163,11 @@
             <a:noAutofit/>
           </a:bodyPr>
           <a:p>
+            <a:pPr>
+              <a:lnSpc>
+                <a:spcPct val="100000"/>
+              </a:lnSpc>
+            </a:pPr>
             <a:endParaRPr b="0" lang="en-US" sz="1800" spc="-1" strike="noStrike">
               <a:solidFill>
                 <a:srgbClr val="ffffff"/>
@@ -3927,7 +4186,7 @@
         <p:spPr>
           <a:xfrm>
             <a:off x="365760" y="0"/>
-            <a:ext cx="8229240" cy="594000"/>
+            <a:ext cx="8228880" cy="593640"/>
           </a:xfrm>
           <a:prstGeom prst="rect">
             <a:avLst/>
@@ -3957,7 +4216,7 @@
               </a:tabLst>
             </a:pPr>
             <a:r>
-              <a:rPr b="1" lang="en-US" sz="1400" spc="299" strike="noStrike">
+              <a:rPr b="1" lang="en-US" sz="1400" spc="296" strike="noStrike">
                 <a:solidFill>
                   <a:srgbClr val="0bc4c4"/>
                 </a:solidFill>
@@ -3983,7 +4242,7 @@
         <p:spPr>
           <a:xfrm>
             <a:off x="274320" y="731520"/>
-            <a:ext cx="8595000" cy="1279800"/>
+            <a:ext cx="8594640" cy="1279440"/>
           </a:xfrm>
           <a:prstGeom prst="rect">
             <a:avLst/>
@@ -4016,6 +4275,11 @@
             <a:noAutofit/>
           </a:bodyPr>
           <a:p>
+            <a:pPr>
+              <a:lnSpc>
+                <a:spcPct val="100000"/>
+              </a:lnSpc>
+            </a:pPr>
             <a:endParaRPr b="0" lang="en-US" sz="1800" spc="-1" strike="noStrike">
               <a:solidFill>
                 <a:srgbClr val="ffffff"/>
@@ -4034,7 +4298,7 @@
         <p:spPr>
           <a:xfrm>
             <a:off x="502920" y="868680"/>
-            <a:ext cx="8137800" cy="1005480"/>
+            <a:ext cx="8137440" cy="1005120"/>
           </a:xfrm>
           <a:prstGeom prst="rect">
             <a:avLst/>
@@ -4091,7 +4355,7 @@
         <p:spPr>
           <a:xfrm>
             <a:off x="274320" y="2240280"/>
-            <a:ext cx="4160160" cy="2468520"/>
+            <a:ext cx="4159800" cy="2468160"/>
           </a:xfrm>
           <a:prstGeom prst="rect">
             <a:avLst/>
@@ -4124,6 +4388,11 @@
             <a:noAutofit/>
           </a:bodyPr>
           <a:p>
+            <a:pPr>
+              <a:lnSpc>
+                <a:spcPct val="100000"/>
+              </a:lnSpc>
+            </a:pPr>
             <a:endParaRPr b="0" lang="en-US" sz="1800" spc="-1" strike="noStrike">
               <a:solidFill>
                 <a:srgbClr val="ffffff"/>
@@ -4142,7 +4411,7 @@
         <p:spPr>
           <a:xfrm>
             <a:off x="274320" y="2240280"/>
-            <a:ext cx="4160160" cy="402120"/>
+            <a:ext cx="4159800" cy="401760"/>
           </a:xfrm>
           <a:prstGeom prst="rect">
             <a:avLst/>
@@ -4168,6 +4437,11 @@
             <a:noAutofit/>
           </a:bodyPr>
           <a:p>
+            <a:pPr>
+              <a:lnSpc>
+                <a:spcPct val="100000"/>
+              </a:lnSpc>
+            </a:pPr>
             <a:endParaRPr b="0" lang="en-US" sz="1800" spc="-1" strike="noStrike">
               <a:solidFill>
                 <a:srgbClr val="ffffff"/>
@@ -4186,7 +4460,7 @@
         <p:spPr>
           <a:xfrm>
             <a:off x="274320" y="2240280"/>
-            <a:ext cx="4160160" cy="402120"/>
+            <a:ext cx="4159800" cy="401760"/>
           </a:xfrm>
           <a:prstGeom prst="rect">
             <a:avLst/>
@@ -4242,7 +4516,7 @@
         <p:spPr>
           <a:xfrm>
             <a:off x="457200" y="2788920"/>
-            <a:ext cx="3794400" cy="1737000"/>
+            <a:ext cx="3794040" cy="1736640"/>
           </a:xfrm>
           <a:prstGeom prst="rect">
             <a:avLst/>
@@ -4299,7 +4573,7 @@
         <p:spPr>
           <a:xfrm>
             <a:off x="4663440" y="2240280"/>
-            <a:ext cx="4160160" cy="2468520"/>
+            <a:ext cx="4159800" cy="2468160"/>
           </a:xfrm>
           <a:prstGeom prst="rect">
             <a:avLst/>
@@ -4332,6 +4606,11 @@
             <a:noAutofit/>
           </a:bodyPr>
           <a:p>
+            <a:pPr>
+              <a:lnSpc>
+                <a:spcPct val="100000"/>
+              </a:lnSpc>
+            </a:pPr>
             <a:endParaRPr b="0" lang="en-US" sz="1800" spc="-1" strike="noStrike">
               <a:solidFill>
                 <a:srgbClr val="ffffff"/>
@@ -4350,7 +4629,7 @@
         <p:spPr>
           <a:xfrm>
             <a:off x="4663440" y="2240280"/>
-            <a:ext cx="4160160" cy="402120"/>
+            <a:ext cx="4159800" cy="401760"/>
           </a:xfrm>
           <a:prstGeom prst="rect">
             <a:avLst/>
@@ -4376,6 +4655,11 @@
             <a:noAutofit/>
           </a:bodyPr>
           <a:p>
+            <a:pPr>
+              <a:lnSpc>
+                <a:spcPct val="100000"/>
+              </a:lnSpc>
+            </a:pPr>
             <a:endParaRPr b="0" lang="en-US" sz="1800" spc="-1" strike="noStrike">
               <a:solidFill>
                 <a:srgbClr val="ffffff"/>
@@ -4394,7 +4678,7 @@
         <p:spPr>
           <a:xfrm>
             <a:off x="4663440" y="2240280"/>
-            <a:ext cx="4160160" cy="402120"/>
+            <a:ext cx="4159800" cy="401760"/>
           </a:xfrm>
           <a:prstGeom prst="rect">
             <a:avLst/>
@@ -4450,7 +4734,7 @@
         <p:spPr>
           <a:xfrm>
             <a:off x="4846320" y="2788920"/>
-            <a:ext cx="3794400" cy="1737000"/>
+            <a:ext cx="3794040" cy="1736640"/>
           </a:xfrm>
           <a:prstGeom prst="rect">
             <a:avLst/>
@@ -4507,7 +4791,7 @@
         <p:spPr>
           <a:xfrm>
             <a:off x="8503920" y="4846320"/>
-            <a:ext cx="456840" cy="182520"/>
+            <a:ext cx="456480" cy="182160"/>
           </a:xfrm>
           <a:prstGeom prst="rect">
             <a:avLst/>
@@ -4600,7 +4884,7 @@
         <p:spPr>
           <a:xfrm>
             <a:off x="0" y="0"/>
-            <a:ext cx="9143640" cy="594000"/>
+            <a:ext cx="9143280" cy="593640"/>
           </a:xfrm>
           <a:prstGeom prst="rect">
             <a:avLst/>
@@ -4626,6 +4910,11 @@
             <a:noAutofit/>
           </a:bodyPr>
           <a:p>
+            <a:pPr>
+              <a:lnSpc>
+                <a:spcPct val="100000"/>
+              </a:lnSpc>
+            </a:pPr>
             <a:endParaRPr b="0" lang="en-US" sz="1800" spc="-1" strike="noStrike">
               <a:solidFill>
                 <a:srgbClr val="ffffff"/>
@@ -4644,7 +4933,7 @@
         <p:spPr>
           <a:xfrm>
             <a:off x="365760" y="0"/>
-            <a:ext cx="8229240" cy="594000"/>
+            <a:ext cx="8228880" cy="593640"/>
           </a:xfrm>
           <a:prstGeom prst="rect">
             <a:avLst/>
@@ -4674,7 +4963,7 @@
               </a:tabLst>
             </a:pPr>
             <a:r>
-              <a:rPr b="1" lang="en-US" sz="1400" spc="299" strike="noStrike">
+              <a:rPr b="1" lang="en-US" sz="1400" spc="296" strike="noStrike">
                 <a:solidFill>
                   <a:srgbClr val="0bc4c4"/>
                 </a:solidFill>
@@ -4700,7 +4989,7 @@
         <p:spPr>
           <a:xfrm>
             <a:off x="274320" y="777240"/>
-            <a:ext cx="8595000" cy="1005480"/>
+            <a:ext cx="8594640" cy="1005120"/>
           </a:xfrm>
           <a:prstGeom prst="rect">
             <a:avLst/>
@@ -4726,6 +5015,11 @@
             <a:noAutofit/>
           </a:bodyPr>
           <a:p>
+            <a:pPr>
+              <a:lnSpc>
+                <a:spcPct val="100000"/>
+              </a:lnSpc>
+            </a:pPr>
             <a:endParaRPr b="0" lang="en-US" sz="1800" spc="-1" strike="noStrike">
               <a:solidFill>
                 <a:srgbClr val="ffffff"/>
@@ -4744,7 +5038,7 @@
         <p:spPr>
           <a:xfrm>
             <a:off x="274320" y="777240"/>
-            <a:ext cx="109440" cy="1005480"/>
+            <a:ext cx="109080" cy="1005120"/>
           </a:xfrm>
           <a:prstGeom prst="rect">
             <a:avLst/>
@@ -4770,6 +5064,11 @@
             <a:noAutofit/>
           </a:bodyPr>
           <a:p>
+            <a:pPr>
+              <a:lnSpc>
+                <a:spcPct val="100000"/>
+              </a:lnSpc>
+            </a:pPr>
             <a:endParaRPr b="0" lang="en-US" sz="1800" spc="-1" strike="noStrike">
               <a:solidFill>
                 <a:srgbClr val="000000"/>
@@ -4788,7 +5087,7 @@
         <p:spPr>
           <a:xfrm>
             <a:off x="594360" y="822960"/>
-            <a:ext cx="8046360" cy="914040"/>
+            <a:ext cx="8046000" cy="913680"/>
           </a:xfrm>
           <a:prstGeom prst="rect">
             <a:avLst/>
@@ -4855,7 +5154,7 @@
         <p:spPr>
           <a:xfrm>
             <a:off x="365760" y="2011680"/>
-            <a:ext cx="2605680" cy="2285640"/>
+            <a:ext cx="2605320" cy="2285280"/>
           </a:xfrm>
           <a:prstGeom prst="rect">
             <a:avLst/>
@@ -4888,6 +5187,11 @@
             <a:noAutofit/>
           </a:bodyPr>
           <a:p>
+            <a:pPr>
+              <a:lnSpc>
+                <a:spcPct val="100000"/>
+              </a:lnSpc>
+            </a:pPr>
             <a:endParaRPr b="0" lang="en-US" sz="1800" spc="-1" strike="noStrike">
               <a:solidFill>
                 <a:srgbClr val="ffffff"/>
@@ -4906,7 +5210,7 @@
         <p:spPr>
           <a:xfrm>
             <a:off x="1188720" y="2103120"/>
-            <a:ext cx="959760" cy="959760"/>
+            <a:ext cx="959400" cy="959400"/>
           </a:xfrm>
           <a:prstGeom prst="ellipse">
             <a:avLst/>
@@ -4932,6 +5236,11 @@
             <a:noAutofit/>
           </a:bodyPr>
           <a:p>
+            <a:pPr>
+              <a:lnSpc>
+                <a:spcPct val="100000"/>
+              </a:lnSpc>
+            </a:pPr>
             <a:endParaRPr b="0" lang="en-US" sz="1800" spc="-1" strike="noStrike">
               <a:solidFill>
                 <a:srgbClr val="ffffff"/>
@@ -4950,7 +5259,7 @@
         <p:spPr>
           <a:xfrm>
             <a:off x="1188720" y="2103120"/>
-            <a:ext cx="959760" cy="959760"/>
+            <a:ext cx="959400" cy="959400"/>
           </a:xfrm>
           <a:prstGeom prst="rect">
             <a:avLst/>
@@ -5006,7 +5315,7 @@
         <p:spPr>
           <a:xfrm>
             <a:off x="502920" y="3246120"/>
-            <a:ext cx="2331360" cy="914040"/>
+            <a:ext cx="2331000" cy="913680"/>
           </a:xfrm>
           <a:prstGeom prst="rect">
             <a:avLst/>
@@ -5063,7 +5372,7 @@
         <p:spPr>
           <a:xfrm>
             <a:off x="3063240" y="2441520"/>
-            <a:ext cx="228240" cy="72720"/>
+            <a:ext cx="227880" cy="72360"/>
           </a:xfrm>
           <a:prstGeom prst="rect">
             <a:avLst/>
@@ -5089,6 +5398,11 @@
             <a:noAutofit/>
           </a:bodyPr>
           <a:p>
+            <a:pPr>
+              <a:lnSpc>
+                <a:spcPct val="100000"/>
+              </a:lnSpc>
+            </a:pPr>
             <a:endParaRPr b="0" lang="en-US" sz="1800" spc="-1" strike="noStrike">
               <a:solidFill>
                 <a:srgbClr val="000000"/>
@@ -5107,7 +5421,7 @@
         <p:spPr>
           <a:xfrm>
             <a:off x="3246120" y="2011680"/>
-            <a:ext cx="2605680" cy="2285640"/>
+            <a:ext cx="2605320" cy="2285280"/>
           </a:xfrm>
           <a:prstGeom prst="rect">
             <a:avLst/>
@@ -5140,6 +5454,11 @@
             <a:noAutofit/>
           </a:bodyPr>
           <a:p>
+            <a:pPr>
+              <a:lnSpc>
+                <a:spcPct val="100000"/>
+              </a:lnSpc>
+            </a:pPr>
             <a:endParaRPr b="0" lang="en-US" sz="1800" spc="-1" strike="noStrike">
               <a:solidFill>
                 <a:srgbClr val="ffffff"/>
@@ -5158,7 +5477,7 @@
         <p:spPr>
           <a:xfrm>
             <a:off x="4069080" y="2103120"/>
-            <a:ext cx="959760" cy="959760"/>
+            <a:ext cx="959400" cy="959400"/>
           </a:xfrm>
           <a:prstGeom prst="ellipse">
             <a:avLst/>
@@ -5184,6 +5503,11 @@
             <a:noAutofit/>
           </a:bodyPr>
           <a:p>
+            <a:pPr>
+              <a:lnSpc>
+                <a:spcPct val="100000"/>
+              </a:lnSpc>
+            </a:pPr>
             <a:endParaRPr b="0" lang="en-US" sz="1800" spc="-1" strike="noStrike">
               <a:solidFill>
                 <a:srgbClr val="ffffff"/>
@@ -5202,7 +5526,7 @@
         <p:spPr>
           <a:xfrm>
             <a:off x="4069080" y="2103120"/>
-            <a:ext cx="959760" cy="959760"/>
+            <a:ext cx="959400" cy="959400"/>
           </a:xfrm>
           <a:prstGeom prst="rect">
             <a:avLst/>
@@ -5258,7 +5582,7 @@
         <p:spPr>
           <a:xfrm>
             <a:off x="3383280" y="3246120"/>
-            <a:ext cx="2331360" cy="914040"/>
+            <a:ext cx="2331000" cy="913680"/>
           </a:xfrm>
           <a:prstGeom prst="rect">
             <a:avLst/>
@@ -5315,7 +5639,7 @@
         <p:spPr>
           <a:xfrm>
             <a:off x="5943600" y="2441520"/>
-            <a:ext cx="228240" cy="72720"/>
+            <a:ext cx="227880" cy="72360"/>
           </a:xfrm>
           <a:prstGeom prst="rect">
             <a:avLst/>
@@ -5341,6 +5665,11 @@
             <a:noAutofit/>
           </a:bodyPr>
           <a:p>
+            <a:pPr>
+              <a:lnSpc>
+                <a:spcPct val="100000"/>
+              </a:lnSpc>
+            </a:pPr>
             <a:endParaRPr b="0" lang="en-US" sz="1800" spc="-1" strike="noStrike">
               <a:solidFill>
                 <a:srgbClr val="000000"/>
@@ -5359,7 +5688,7 @@
         <p:spPr>
           <a:xfrm>
             <a:off x="6126480" y="2011680"/>
-            <a:ext cx="2605680" cy="2285640"/>
+            <a:ext cx="2605320" cy="2285280"/>
           </a:xfrm>
           <a:prstGeom prst="rect">
             <a:avLst/>
@@ -5392,6 +5721,11 @@
             <a:noAutofit/>
           </a:bodyPr>
           <a:p>
+            <a:pPr>
+              <a:lnSpc>
+                <a:spcPct val="100000"/>
+              </a:lnSpc>
+            </a:pPr>
             <a:endParaRPr b="0" lang="en-US" sz="1800" spc="-1" strike="noStrike">
               <a:solidFill>
                 <a:srgbClr val="ffffff"/>
@@ -5410,7 +5744,7 @@
         <p:spPr>
           <a:xfrm>
             <a:off x="6949440" y="2103120"/>
-            <a:ext cx="959760" cy="959760"/>
+            <a:ext cx="959400" cy="959400"/>
           </a:xfrm>
           <a:prstGeom prst="ellipse">
             <a:avLst/>
@@ -5436,6 +5770,11 @@
             <a:noAutofit/>
           </a:bodyPr>
           <a:p>
+            <a:pPr>
+              <a:lnSpc>
+                <a:spcPct val="100000"/>
+              </a:lnSpc>
+            </a:pPr>
             <a:endParaRPr b="0" lang="en-US" sz="1800" spc="-1" strike="noStrike">
               <a:solidFill>
                 <a:srgbClr val="ffffff"/>
@@ -5454,7 +5793,7 @@
         <p:spPr>
           <a:xfrm>
             <a:off x="6949440" y="2103120"/>
-            <a:ext cx="959760" cy="959760"/>
+            <a:ext cx="959400" cy="959400"/>
           </a:xfrm>
           <a:prstGeom prst="rect">
             <a:avLst/>
@@ -5510,7 +5849,7 @@
         <p:spPr>
           <a:xfrm>
             <a:off x="6263640" y="3246120"/>
-            <a:ext cx="2331360" cy="914040"/>
+            <a:ext cx="2331000" cy="913680"/>
           </a:xfrm>
           <a:prstGeom prst="rect">
             <a:avLst/>
@@ -5567,7 +5906,7 @@
         <p:spPr>
           <a:xfrm>
             <a:off x="365760" y="4526280"/>
-            <a:ext cx="8412120" cy="411120"/>
+            <a:ext cx="8411760" cy="410760"/>
           </a:xfrm>
           <a:prstGeom prst="rect">
             <a:avLst/>
@@ -5623,7 +5962,7 @@
         <p:spPr>
           <a:xfrm>
             <a:off x="8503920" y="4846320"/>
-            <a:ext cx="456840" cy="182520"/>
+            <a:ext cx="456480" cy="182160"/>
           </a:xfrm>
           <a:prstGeom prst="rect">
             <a:avLst/>
@@ -5716,7 +6055,7 @@
         <p:spPr>
           <a:xfrm>
             <a:off x="0" y="0"/>
-            <a:ext cx="9143640" cy="594000"/>
+            <a:ext cx="9143280" cy="593640"/>
           </a:xfrm>
           <a:prstGeom prst="rect">
             <a:avLst/>
@@ -5742,6 +6081,11 @@
             <a:noAutofit/>
           </a:bodyPr>
           <a:p>
+            <a:pPr>
+              <a:lnSpc>
+                <a:spcPct val="100000"/>
+              </a:lnSpc>
+            </a:pPr>
             <a:endParaRPr b="0" lang="en-US" sz="1800" spc="-1" strike="noStrike">
               <a:solidFill>
                 <a:srgbClr val="ffffff"/>
@@ -5760,7 +6104,7 @@
         <p:spPr>
           <a:xfrm>
             <a:off x="365760" y="0"/>
-            <a:ext cx="8229240" cy="594000"/>
+            <a:ext cx="8228880" cy="593640"/>
           </a:xfrm>
           <a:prstGeom prst="rect">
             <a:avLst/>
@@ -5790,7 +6134,7 @@
               </a:tabLst>
             </a:pPr>
             <a:r>
-              <a:rPr b="1" lang="en-US" sz="1400" spc="299" strike="noStrike">
+              <a:rPr b="1" lang="en-US" sz="1400" spc="296" strike="noStrike">
                 <a:solidFill>
                   <a:srgbClr val="0bc4c4"/>
                 </a:solidFill>
@@ -5816,7 +6160,7 @@
         <p:spPr>
           <a:xfrm>
             <a:off x="274320" y="777240"/>
-            <a:ext cx="8595000" cy="685440"/>
+            <a:ext cx="8594640" cy="685080"/>
           </a:xfrm>
           <a:prstGeom prst="rect">
             <a:avLst/>
@@ -5842,6 +6186,11 @@
             <a:noAutofit/>
           </a:bodyPr>
           <a:p>
+            <a:pPr>
+              <a:lnSpc>
+                <a:spcPct val="100000"/>
+              </a:lnSpc>
+            </a:pPr>
             <a:endParaRPr b="0" lang="en-US" sz="1800" spc="-1" strike="noStrike">
               <a:solidFill>
                 <a:srgbClr val="ffffff"/>
@@ -5860,7 +6209,7 @@
         <p:spPr>
           <a:xfrm>
             <a:off x="274320" y="777240"/>
-            <a:ext cx="776880" cy="685440"/>
+            <a:ext cx="776520" cy="685080"/>
           </a:xfrm>
           <a:prstGeom prst="rect">
             <a:avLst/>
@@ -5886,6 +6235,11 @@
             <a:noAutofit/>
           </a:bodyPr>
           <a:p>
+            <a:pPr>
+              <a:lnSpc>
+                <a:spcPct val="100000"/>
+              </a:lnSpc>
+            </a:pPr>
             <a:endParaRPr b="0" lang="en-US" sz="1800" spc="-1" strike="noStrike">
               <a:solidFill>
                 <a:srgbClr val="ffffff"/>
@@ -5904,7 +6258,7 @@
         <p:spPr>
           <a:xfrm>
             <a:off x="274320" y="777240"/>
-            <a:ext cx="776880" cy="685440"/>
+            <a:ext cx="776520" cy="685080"/>
           </a:xfrm>
           <a:prstGeom prst="rect">
             <a:avLst/>
@@ -5960,7 +6314,7 @@
         <p:spPr>
           <a:xfrm>
             <a:off x="1188720" y="822960"/>
-            <a:ext cx="2194200" cy="319680"/>
+            <a:ext cx="2193840" cy="319320"/>
           </a:xfrm>
           <a:prstGeom prst="rect">
             <a:avLst/>
@@ -6016,7 +6370,7 @@
         <p:spPr>
           <a:xfrm>
             <a:off x="1188720" y="1097280"/>
-            <a:ext cx="7497720" cy="319680"/>
+            <a:ext cx="7497360" cy="319320"/>
           </a:xfrm>
           <a:prstGeom prst="rect">
             <a:avLst/>
@@ -6072,7 +6426,7 @@
         <p:spPr>
           <a:xfrm>
             <a:off x="274320" y="1572840"/>
-            <a:ext cx="8595000" cy="685440"/>
+            <a:ext cx="8594640" cy="685080"/>
           </a:xfrm>
           <a:prstGeom prst="rect">
             <a:avLst/>
@@ -6098,6 +6452,11 @@
             <a:noAutofit/>
           </a:bodyPr>
           <a:p>
+            <a:pPr>
+              <a:lnSpc>
+                <a:spcPct val="100000"/>
+              </a:lnSpc>
+            </a:pPr>
             <a:endParaRPr b="0" lang="en-US" sz="1800" spc="-1" strike="noStrike">
               <a:solidFill>
                 <a:srgbClr val="ffffff"/>
@@ -6116,7 +6475,7 @@
         <p:spPr>
           <a:xfrm>
             <a:off x="274320" y="1572840"/>
-            <a:ext cx="776880" cy="685440"/>
+            <a:ext cx="776520" cy="685080"/>
           </a:xfrm>
           <a:prstGeom prst="rect">
             <a:avLst/>
@@ -6142,6 +6501,11 @@
             <a:noAutofit/>
           </a:bodyPr>
           <a:p>
+            <a:pPr>
+              <a:lnSpc>
+                <a:spcPct val="100000"/>
+              </a:lnSpc>
+            </a:pPr>
             <a:endParaRPr b="0" lang="en-US" sz="1800" spc="-1" strike="noStrike">
               <a:solidFill>
                 <a:srgbClr val="ffffff"/>
@@ -6160,7 +6524,7 @@
         <p:spPr>
           <a:xfrm>
             <a:off x="274320" y="1572840"/>
-            <a:ext cx="776880" cy="685440"/>
+            <a:ext cx="776520" cy="685080"/>
           </a:xfrm>
           <a:prstGeom prst="rect">
             <a:avLst/>
@@ -6216,7 +6580,7 @@
         <p:spPr>
           <a:xfrm>
             <a:off x="1188720" y="1618560"/>
-            <a:ext cx="2194200" cy="319680"/>
+            <a:ext cx="2193840" cy="319320"/>
           </a:xfrm>
           <a:prstGeom prst="rect">
             <a:avLst/>
@@ -6272,7 +6636,7 @@
         <p:spPr>
           <a:xfrm>
             <a:off x="1188720" y="1892880"/>
-            <a:ext cx="7497720" cy="319680"/>
+            <a:ext cx="7497360" cy="319320"/>
           </a:xfrm>
           <a:prstGeom prst="rect">
             <a:avLst/>
@@ -6328,7 +6692,7 @@
         <p:spPr>
           <a:xfrm>
             <a:off x="274320" y="2368440"/>
-            <a:ext cx="8595000" cy="685440"/>
+            <a:ext cx="8594640" cy="685080"/>
           </a:xfrm>
           <a:prstGeom prst="rect">
             <a:avLst/>
@@ -6354,6 +6718,11 @@
             <a:noAutofit/>
           </a:bodyPr>
           <a:p>
+            <a:pPr>
+              <a:lnSpc>
+                <a:spcPct val="100000"/>
+              </a:lnSpc>
+            </a:pPr>
             <a:endParaRPr b="0" lang="en-US" sz="1800" spc="-1" strike="noStrike">
               <a:solidFill>
                 <a:srgbClr val="ffffff"/>
@@ -6372,7 +6741,7 @@
         <p:spPr>
           <a:xfrm>
             <a:off x="274320" y="2368440"/>
-            <a:ext cx="776880" cy="685440"/>
+            <a:ext cx="776520" cy="685080"/>
           </a:xfrm>
           <a:prstGeom prst="rect">
             <a:avLst/>
@@ -6398,6 +6767,11 @@
             <a:noAutofit/>
           </a:bodyPr>
           <a:p>
+            <a:pPr>
+              <a:lnSpc>
+                <a:spcPct val="100000"/>
+              </a:lnSpc>
+            </a:pPr>
             <a:endParaRPr b="0" lang="en-US" sz="1800" spc="-1" strike="noStrike">
               <a:solidFill>
                 <a:srgbClr val="ffffff"/>
@@ -6416,7 +6790,7 @@
         <p:spPr>
           <a:xfrm>
             <a:off x="274320" y="2368440"/>
-            <a:ext cx="776880" cy="685440"/>
+            <a:ext cx="776520" cy="685080"/>
           </a:xfrm>
           <a:prstGeom prst="rect">
             <a:avLst/>
@@ -6472,7 +6846,7 @@
         <p:spPr>
           <a:xfrm>
             <a:off x="1188720" y="2414160"/>
-            <a:ext cx="2194200" cy="319680"/>
+            <a:ext cx="2193840" cy="319320"/>
           </a:xfrm>
           <a:prstGeom prst="rect">
             <a:avLst/>
@@ -6528,7 +6902,7 @@
         <p:spPr>
           <a:xfrm>
             <a:off x="1188720" y="2688480"/>
-            <a:ext cx="7497720" cy="319680"/>
+            <a:ext cx="7497360" cy="319320"/>
           </a:xfrm>
           <a:prstGeom prst="rect">
             <a:avLst/>
@@ -6584,7 +6958,7 @@
         <p:spPr>
           <a:xfrm>
             <a:off x="274320" y="3163680"/>
-            <a:ext cx="8595000" cy="685440"/>
+            <a:ext cx="8594640" cy="685080"/>
           </a:xfrm>
           <a:prstGeom prst="rect">
             <a:avLst/>
@@ -6610,6 +6984,11 @@
             <a:noAutofit/>
           </a:bodyPr>
           <a:p>
+            <a:pPr>
+              <a:lnSpc>
+                <a:spcPct val="100000"/>
+              </a:lnSpc>
+            </a:pPr>
             <a:endParaRPr b="0" lang="en-US" sz="1800" spc="-1" strike="noStrike">
               <a:solidFill>
                 <a:srgbClr val="ffffff"/>
@@ -6628,7 +7007,7 @@
         <p:spPr>
           <a:xfrm>
             <a:off x="274320" y="3163680"/>
-            <a:ext cx="776880" cy="685440"/>
+            <a:ext cx="776520" cy="685080"/>
           </a:xfrm>
           <a:prstGeom prst="rect">
             <a:avLst/>
@@ -6654,6 +7033,11 @@
             <a:noAutofit/>
           </a:bodyPr>
           <a:p>
+            <a:pPr>
+              <a:lnSpc>
+                <a:spcPct val="100000"/>
+              </a:lnSpc>
+            </a:pPr>
             <a:endParaRPr b="0" lang="en-US" sz="1800" spc="-1" strike="noStrike">
               <a:solidFill>
                 <a:srgbClr val="ffffff"/>
@@ -6672,7 +7056,7 @@
         <p:spPr>
           <a:xfrm>
             <a:off x="274320" y="3163680"/>
-            <a:ext cx="776880" cy="685440"/>
+            <a:ext cx="776520" cy="685080"/>
           </a:xfrm>
           <a:prstGeom prst="rect">
             <a:avLst/>
@@ -6728,7 +7112,7 @@
         <p:spPr>
           <a:xfrm>
             <a:off x="1188720" y="3209400"/>
-            <a:ext cx="2194200" cy="319680"/>
+            <a:ext cx="2193840" cy="319320"/>
           </a:xfrm>
           <a:prstGeom prst="rect">
             <a:avLst/>
@@ -6784,7 +7168,7 @@
         <p:spPr>
           <a:xfrm>
             <a:off x="1188720" y="3483720"/>
-            <a:ext cx="7497720" cy="319680"/>
+            <a:ext cx="7497360" cy="319320"/>
           </a:xfrm>
           <a:prstGeom prst="rect">
             <a:avLst/>
@@ -6840,7 +7224,7 @@
         <p:spPr>
           <a:xfrm>
             <a:off x="274320" y="3959280"/>
-            <a:ext cx="8595000" cy="685440"/>
+            <a:ext cx="8594640" cy="685080"/>
           </a:xfrm>
           <a:prstGeom prst="rect">
             <a:avLst/>
@@ -6866,6 +7250,11 @@
             <a:noAutofit/>
           </a:bodyPr>
           <a:p>
+            <a:pPr>
+              <a:lnSpc>
+                <a:spcPct val="100000"/>
+              </a:lnSpc>
+            </a:pPr>
             <a:endParaRPr b="0" lang="en-US" sz="1800" spc="-1" strike="noStrike">
               <a:solidFill>
                 <a:srgbClr val="ffffff"/>
@@ -6884,7 +7273,7 @@
         <p:spPr>
           <a:xfrm>
             <a:off x="274320" y="3959280"/>
-            <a:ext cx="776880" cy="685440"/>
+            <a:ext cx="776520" cy="685080"/>
           </a:xfrm>
           <a:prstGeom prst="rect">
             <a:avLst/>
@@ -6910,6 +7299,11 @@
             <a:noAutofit/>
           </a:bodyPr>
           <a:p>
+            <a:pPr>
+              <a:lnSpc>
+                <a:spcPct val="100000"/>
+              </a:lnSpc>
+            </a:pPr>
             <a:endParaRPr b="0" lang="en-US" sz="1800" spc="-1" strike="noStrike">
               <a:solidFill>
                 <a:srgbClr val="ffffff"/>
@@ -6928,7 +7322,7 @@
         <p:spPr>
           <a:xfrm>
             <a:off x="274320" y="3959280"/>
-            <a:ext cx="776880" cy="685440"/>
+            <a:ext cx="776520" cy="685080"/>
           </a:xfrm>
           <a:prstGeom prst="rect">
             <a:avLst/>
@@ -6984,7 +7378,7 @@
         <p:spPr>
           <a:xfrm>
             <a:off x="1188720" y="4005000"/>
-            <a:ext cx="2194200" cy="319680"/>
+            <a:ext cx="2193840" cy="319320"/>
           </a:xfrm>
           <a:prstGeom prst="rect">
             <a:avLst/>
@@ -7040,7 +7434,7 @@
         <p:spPr>
           <a:xfrm>
             <a:off x="1188720" y="4279320"/>
-            <a:ext cx="7497720" cy="319680"/>
+            <a:ext cx="7497360" cy="319320"/>
           </a:xfrm>
           <a:prstGeom prst="rect">
             <a:avLst/>
@@ -7096,7 +7490,7 @@
         <p:spPr>
           <a:xfrm>
             <a:off x="8503920" y="4846320"/>
-            <a:ext cx="456840" cy="182520"/>
+            <a:ext cx="456480" cy="182160"/>
           </a:xfrm>
           <a:prstGeom prst="rect">
             <a:avLst/>
@@ -7189,7 +7583,7 @@
         <p:spPr>
           <a:xfrm>
             <a:off x="0" y="0"/>
-            <a:ext cx="9143640" cy="594000"/>
+            <a:ext cx="9143280" cy="593640"/>
           </a:xfrm>
           <a:prstGeom prst="rect">
             <a:avLst/>
@@ -7215,6 +7609,11 @@
             <a:noAutofit/>
           </a:bodyPr>
           <a:p>
+            <a:pPr>
+              <a:lnSpc>
+                <a:spcPct val="100000"/>
+              </a:lnSpc>
+            </a:pPr>
             <a:endParaRPr b="0" lang="en-US" sz="1800" spc="-1" strike="noStrike">
               <a:solidFill>
                 <a:srgbClr val="ffffff"/>
@@ -7233,7 +7632,7 @@
         <p:spPr>
           <a:xfrm>
             <a:off x="365760" y="0"/>
-            <a:ext cx="8229240" cy="594000"/>
+            <a:ext cx="8228880" cy="593640"/>
           </a:xfrm>
           <a:prstGeom prst="rect">
             <a:avLst/>
@@ -7263,7 +7662,7 @@
               </a:tabLst>
             </a:pPr>
             <a:r>
-              <a:rPr b="1" lang="en-US" sz="1400" spc="299" strike="noStrike">
+              <a:rPr b="1" lang="en-US" sz="1400" spc="296" strike="noStrike">
                 <a:solidFill>
                   <a:srgbClr val="0bc4c4"/>
                 </a:solidFill>
@@ -7289,7 +7688,7 @@
         <p:spPr>
           <a:xfrm>
             <a:off x="274320" y="868680"/>
-            <a:ext cx="8595000" cy="1737000"/>
+            <a:ext cx="8594640" cy="1736640"/>
           </a:xfrm>
           <a:prstGeom prst="rect">
             <a:avLst/>
@@ -7322,6 +7721,11 @@
             <a:noAutofit/>
           </a:bodyPr>
           <a:p>
+            <a:pPr>
+              <a:lnSpc>
+                <a:spcPct val="100000"/>
+              </a:lnSpc>
+            </a:pPr>
             <a:endParaRPr b="0" lang="en-US" sz="1800" spc="-1" strike="noStrike">
               <a:solidFill>
                 <a:srgbClr val="ffffff"/>
@@ -7340,7 +7744,7 @@
         <p:spPr>
           <a:xfrm>
             <a:off x="411480" y="1234440"/>
-            <a:ext cx="1005480" cy="1005480"/>
+            <a:ext cx="1005120" cy="1005120"/>
           </a:xfrm>
           <a:prstGeom prst="ellipse">
             <a:avLst/>
@@ -7366,6 +7770,11 @@
             <a:noAutofit/>
           </a:bodyPr>
           <a:p>
+            <a:pPr>
+              <a:lnSpc>
+                <a:spcPct val="100000"/>
+              </a:lnSpc>
+            </a:pPr>
             <a:endParaRPr b="0" lang="en-US" sz="1800" spc="-1" strike="noStrike">
               <a:solidFill>
                 <a:srgbClr val="ffffff"/>
@@ -7384,7 +7793,7 @@
         <p:spPr>
           <a:xfrm>
             <a:off x="411480" y="1234440"/>
-            <a:ext cx="1005480" cy="1005480"/>
+            <a:ext cx="1005120" cy="1005120"/>
           </a:xfrm>
           <a:prstGeom prst="rect">
             <a:avLst/>
@@ -7440,7 +7849,7 @@
         <p:spPr>
           <a:xfrm>
             <a:off x="1600200" y="1051560"/>
-            <a:ext cx="7040520" cy="456840"/>
+            <a:ext cx="7040160" cy="456480"/>
           </a:xfrm>
           <a:prstGeom prst="rect">
             <a:avLst/>
@@ -7496,7 +7905,7 @@
         <p:spPr>
           <a:xfrm>
             <a:off x="1600200" y="1554480"/>
-            <a:ext cx="7040520" cy="914040"/>
+            <a:ext cx="7040160" cy="913680"/>
           </a:xfrm>
           <a:prstGeom prst="rect">
             <a:avLst/>
@@ -7552,7 +7961,7 @@
         <p:spPr>
           <a:xfrm>
             <a:off x="274320" y="2880360"/>
-            <a:ext cx="8595000" cy="1737000"/>
+            <a:ext cx="8594640" cy="1736640"/>
           </a:xfrm>
           <a:prstGeom prst="rect">
             <a:avLst/>
@@ -7585,6 +7994,11 @@
             <a:noAutofit/>
           </a:bodyPr>
           <a:p>
+            <a:pPr>
+              <a:lnSpc>
+                <a:spcPct val="100000"/>
+              </a:lnSpc>
+            </a:pPr>
             <a:endParaRPr b="0" lang="en-US" sz="1800" spc="-1" strike="noStrike">
               <a:solidFill>
                 <a:srgbClr val="ffffff"/>
@@ -7603,7 +8017,7 @@
         <p:spPr>
           <a:xfrm>
             <a:off x="411480" y="3246120"/>
-            <a:ext cx="1005480" cy="1005480"/>
+            <a:ext cx="1005120" cy="1005120"/>
           </a:xfrm>
           <a:prstGeom prst="ellipse">
             <a:avLst/>
@@ -7629,6 +8043,11 @@
             <a:noAutofit/>
           </a:bodyPr>
           <a:p>
+            <a:pPr>
+              <a:lnSpc>
+                <a:spcPct val="100000"/>
+              </a:lnSpc>
+            </a:pPr>
             <a:endParaRPr b="0" lang="en-US" sz="1800" spc="-1" strike="noStrike">
               <a:solidFill>
                 <a:srgbClr val="ffffff"/>
@@ -7647,7 +8066,7 @@
         <p:spPr>
           <a:xfrm>
             <a:off x="411480" y="3246120"/>
-            <a:ext cx="1005480" cy="1005480"/>
+            <a:ext cx="1005120" cy="1005120"/>
           </a:xfrm>
           <a:prstGeom prst="rect">
             <a:avLst/>
@@ -7703,7 +8122,7 @@
         <p:spPr>
           <a:xfrm>
             <a:off x="1600200" y="3063240"/>
-            <a:ext cx="7040520" cy="456840"/>
+            <a:ext cx="7040160" cy="456480"/>
           </a:xfrm>
           <a:prstGeom prst="rect">
             <a:avLst/>
@@ -7759,7 +8178,7 @@
         <p:spPr>
           <a:xfrm>
             <a:off x="1600200" y="3566160"/>
-            <a:ext cx="7040520" cy="914040"/>
+            <a:ext cx="7040160" cy="913680"/>
           </a:xfrm>
           <a:prstGeom prst="rect">
             <a:avLst/>
@@ -7815,7 +8234,7 @@
         <p:spPr>
           <a:xfrm>
             <a:off x="274320" y="4709160"/>
-            <a:ext cx="8595000" cy="273960"/>
+            <a:ext cx="8594640" cy="273600"/>
           </a:xfrm>
           <a:prstGeom prst="rect">
             <a:avLst/>
@@ -7871,7 +8290,7 @@
         <p:spPr>
           <a:xfrm>
             <a:off x="8503920" y="4846320"/>
-            <a:ext cx="456840" cy="182520"/>
+            <a:ext cx="456480" cy="182160"/>
           </a:xfrm>
           <a:prstGeom prst="rect">
             <a:avLst/>
@@ -7964,7 +8383,7 @@
         <p:spPr>
           <a:xfrm>
             <a:off x="0" y="0"/>
-            <a:ext cx="9143640" cy="594000"/>
+            <a:ext cx="9143280" cy="593640"/>
           </a:xfrm>
           <a:prstGeom prst="rect">
             <a:avLst/>
@@ -7990,6 +8409,11 @@
             <a:noAutofit/>
           </a:bodyPr>
           <a:p>
+            <a:pPr>
+              <a:lnSpc>
+                <a:spcPct val="100000"/>
+              </a:lnSpc>
+            </a:pPr>
             <a:endParaRPr b="0" lang="en-US" sz="1800" spc="-1" strike="noStrike">
               <a:solidFill>
                 <a:srgbClr val="ffffff"/>
@@ -8008,7 +8432,7 @@
         <p:spPr>
           <a:xfrm>
             <a:off x="365760" y="0"/>
-            <a:ext cx="8229240" cy="594000"/>
+            <a:ext cx="8228880" cy="593640"/>
           </a:xfrm>
           <a:prstGeom prst="rect">
             <a:avLst/>
@@ -8038,7 +8462,7 @@
               </a:tabLst>
             </a:pPr>
             <a:r>
-              <a:rPr b="1" lang="en-US" sz="1400" spc="299" strike="noStrike">
+              <a:rPr b="1" lang="en-US" sz="1400" spc="296" strike="noStrike">
                 <a:solidFill>
                   <a:srgbClr val="0bc4c4"/>
                 </a:solidFill>
@@ -8064,7 +8488,7 @@
         <p:spPr>
           <a:xfrm>
             <a:off x="274320" y="777240"/>
-            <a:ext cx="4160160" cy="1096920"/>
+            <a:ext cx="4159800" cy="1096560"/>
           </a:xfrm>
           <a:prstGeom prst="rect">
             <a:avLst/>
@@ -8097,6 +8521,11 @@
             <a:noAutofit/>
           </a:bodyPr>
           <a:p>
+            <a:pPr>
+              <a:lnSpc>
+                <a:spcPct val="100000"/>
+              </a:lnSpc>
+            </a:pPr>
             <a:endParaRPr b="0" lang="en-US" sz="1800" spc="-1" strike="noStrike">
               <a:solidFill>
                 <a:srgbClr val="ffffff"/>
@@ -8115,7 +8544,7 @@
         <p:spPr>
           <a:xfrm>
             <a:off x="457200" y="868680"/>
-            <a:ext cx="639720" cy="914040"/>
+            <a:ext cx="639360" cy="913680"/>
           </a:xfrm>
           <a:prstGeom prst="rect">
             <a:avLst/>
@@ -8171,7 +8600,7 @@
         <p:spPr>
           <a:xfrm>
             <a:off x="1188720" y="868680"/>
-            <a:ext cx="3062880" cy="347040"/>
+            <a:ext cx="3062520" cy="346680"/>
           </a:xfrm>
           <a:prstGeom prst="rect">
             <a:avLst/>
@@ -8227,7 +8656,7 @@
         <p:spPr>
           <a:xfrm>
             <a:off x="1188720" y="1234440"/>
-            <a:ext cx="3062880" cy="594000"/>
+            <a:ext cx="3062520" cy="593640"/>
           </a:xfrm>
           <a:prstGeom prst="rect">
             <a:avLst/>
@@ -8283,7 +8712,7 @@
         <p:spPr>
           <a:xfrm>
             <a:off x="4709160" y="777240"/>
-            <a:ext cx="4160160" cy="1096920"/>
+            <a:ext cx="4159800" cy="1096560"/>
           </a:xfrm>
           <a:prstGeom prst="rect">
             <a:avLst/>
@@ -8316,6 +8745,11 @@
             <a:noAutofit/>
           </a:bodyPr>
           <a:p>
+            <a:pPr>
+              <a:lnSpc>
+                <a:spcPct val="100000"/>
+              </a:lnSpc>
+            </a:pPr>
             <a:endParaRPr b="0" lang="en-US" sz="1800" spc="-1" strike="noStrike">
               <a:solidFill>
                 <a:srgbClr val="ffffff"/>
@@ -8334,7 +8768,7 @@
         <p:spPr>
           <a:xfrm>
             <a:off x="4892040" y="868680"/>
-            <a:ext cx="639720" cy="914040"/>
+            <a:ext cx="639360" cy="913680"/>
           </a:xfrm>
           <a:prstGeom prst="rect">
             <a:avLst/>
@@ -8390,7 +8824,7 @@
         <p:spPr>
           <a:xfrm>
             <a:off x="5623560" y="868680"/>
-            <a:ext cx="3062880" cy="347040"/>
+            <a:ext cx="3062520" cy="346680"/>
           </a:xfrm>
           <a:prstGeom prst="rect">
             <a:avLst/>
@@ -8446,7 +8880,7 @@
         <p:spPr>
           <a:xfrm>
             <a:off x="5623560" y="1234440"/>
-            <a:ext cx="3062880" cy="594000"/>
+            <a:ext cx="3062520" cy="593640"/>
           </a:xfrm>
           <a:prstGeom prst="rect">
             <a:avLst/>
@@ -8502,7 +8936,7 @@
         <p:spPr>
           <a:xfrm>
             <a:off x="274320" y="2148840"/>
-            <a:ext cx="4160160" cy="1096920"/>
+            <a:ext cx="4159800" cy="1096560"/>
           </a:xfrm>
           <a:prstGeom prst="rect">
             <a:avLst/>
@@ -8535,6 +8969,11 @@
             <a:noAutofit/>
           </a:bodyPr>
           <a:p>
+            <a:pPr>
+              <a:lnSpc>
+                <a:spcPct val="100000"/>
+              </a:lnSpc>
+            </a:pPr>
             <a:endParaRPr b="0" lang="en-US" sz="1800" spc="-1" strike="noStrike">
               <a:solidFill>
                 <a:srgbClr val="ffffff"/>
@@ -8553,7 +8992,7 @@
         <p:spPr>
           <a:xfrm>
             <a:off x="457200" y="2240280"/>
-            <a:ext cx="639720" cy="914040"/>
+            <a:ext cx="639360" cy="913680"/>
           </a:xfrm>
           <a:prstGeom prst="rect">
             <a:avLst/>
@@ -8609,7 +9048,7 @@
         <p:spPr>
           <a:xfrm>
             <a:off x="1188720" y="2240280"/>
-            <a:ext cx="3062880" cy="347040"/>
+            <a:ext cx="3062520" cy="346680"/>
           </a:xfrm>
           <a:prstGeom prst="rect">
             <a:avLst/>
@@ -8665,7 +9104,7 @@
         <p:spPr>
           <a:xfrm>
             <a:off x="1188720" y="2606040"/>
-            <a:ext cx="3062880" cy="594000"/>
+            <a:ext cx="3062520" cy="593640"/>
           </a:xfrm>
           <a:prstGeom prst="rect">
             <a:avLst/>
@@ -8721,7 +9160,7 @@
         <p:spPr>
           <a:xfrm>
             <a:off x="4709160" y="2148840"/>
-            <a:ext cx="4160160" cy="1096920"/>
+            <a:ext cx="4159800" cy="1096560"/>
           </a:xfrm>
           <a:prstGeom prst="rect">
             <a:avLst/>
@@ -8754,6 +9193,11 @@
             <a:noAutofit/>
           </a:bodyPr>
           <a:p>
+            <a:pPr>
+              <a:lnSpc>
+                <a:spcPct val="100000"/>
+              </a:lnSpc>
+            </a:pPr>
             <a:endParaRPr b="0" lang="en-US" sz="1800" spc="-1" strike="noStrike">
               <a:solidFill>
                 <a:srgbClr val="ffffff"/>
@@ -8772,7 +9216,7 @@
         <p:spPr>
           <a:xfrm>
             <a:off x="4892040" y="2240280"/>
-            <a:ext cx="639720" cy="914040"/>
+            <a:ext cx="639360" cy="913680"/>
           </a:xfrm>
           <a:prstGeom prst="rect">
             <a:avLst/>
@@ -8828,7 +9272,7 @@
         <p:spPr>
           <a:xfrm>
             <a:off x="5623560" y="2240280"/>
-            <a:ext cx="3062880" cy="347040"/>
+            <a:ext cx="3062520" cy="346680"/>
           </a:xfrm>
           <a:prstGeom prst="rect">
             <a:avLst/>
@@ -8884,7 +9328,7 @@
         <p:spPr>
           <a:xfrm>
             <a:off x="5623560" y="2606040"/>
-            <a:ext cx="3062880" cy="594000"/>
+            <a:ext cx="3062520" cy="593640"/>
           </a:xfrm>
           <a:prstGeom prst="rect">
             <a:avLst/>
@@ -8940,7 +9384,7 @@
         <p:spPr>
           <a:xfrm>
             <a:off x="274320" y="3520440"/>
-            <a:ext cx="8595000" cy="1096920"/>
+            <a:ext cx="8594640" cy="1096560"/>
           </a:xfrm>
           <a:prstGeom prst="rect">
             <a:avLst/>
@@ -8973,6 +9417,11 @@
             <a:noAutofit/>
           </a:bodyPr>
           <a:p>
+            <a:pPr>
+              <a:lnSpc>
+                <a:spcPct val="100000"/>
+              </a:lnSpc>
+            </a:pPr>
             <a:endParaRPr b="0" lang="en-US" sz="1800" spc="-1" strike="noStrike">
               <a:solidFill>
                 <a:srgbClr val="ffffff"/>
@@ -8991,7 +9440,7 @@
         <p:spPr>
           <a:xfrm>
             <a:off x="457200" y="3611880"/>
-            <a:ext cx="639720" cy="914040"/>
+            <a:ext cx="639360" cy="913680"/>
           </a:xfrm>
           <a:prstGeom prst="rect">
             <a:avLst/>
@@ -9047,7 +9496,7 @@
         <p:spPr>
           <a:xfrm>
             <a:off x="1188720" y="3611880"/>
-            <a:ext cx="7497720" cy="347040"/>
+            <a:ext cx="7497360" cy="346680"/>
           </a:xfrm>
           <a:prstGeom prst="rect">
             <a:avLst/>
@@ -9103,7 +9552,7 @@
         <p:spPr>
           <a:xfrm>
             <a:off x="1188720" y="3977640"/>
-            <a:ext cx="7497720" cy="594000"/>
+            <a:ext cx="7497360" cy="593640"/>
           </a:xfrm>
           <a:prstGeom prst="rect">
             <a:avLst/>
@@ -9159,7 +9608,7 @@
         <p:spPr>
           <a:xfrm>
             <a:off x="8503920" y="4846320"/>
-            <a:ext cx="456840" cy="182520"/>
+            <a:ext cx="456480" cy="182160"/>
           </a:xfrm>
           <a:prstGeom prst="rect">
             <a:avLst/>
@@ -9252,7 +9701,7 @@
         <p:spPr>
           <a:xfrm>
             <a:off x="0" y="0"/>
-            <a:ext cx="9143640" cy="594000"/>
+            <a:ext cx="9143280" cy="593640"/>
           </a:xfrm>
           <a:prstGeom prst="rect">
             <a:avLst/>
@@ -9278,6 +9727,11 @@
             <a:noAutofit/>
           </a:bodyPr>
           <a:p>
+            <a:pPr>
+              <a:lnSpc>
+                <a:spcPct val="100000"/>
+              </a:lnSpc>
+            </a:pPr>
             <a:endParaRPr b="0" lang="en-US" sz="1800" spc="-1" strike="noStrike">
               <a:solidFill>
                 <a:srgbClr val="ffffff"/>
@@ -9296,7 +9750,7 @@
         <p:spPr>
           <a:xfrm>
             <a:off x="365760" y="0"/>
-            <a:ext cx="8229240" cy="594000"/>
+            <a:ext cx="8228880" cy="593640"/>
           </a:xfrm>
           <a:prstGeom prst="rect">
             <a:avLst/>
@@ -9326,7 +9780,7 @@
               </a:tabLst>
             </a:pPr>
             <a:r>
-              <a:rPr b="1" lang="en-US" sz="1400" spc="299" strike="noStrike">
+              <a:rPr b="1" lang="en-US" sz="1400" spc="296" strike="noStrike">
                 <a:solidFill>
                   <a:srgbClr val="0bc4c4"/>
                 </a:solidFill>
@@ -9352,7 +9806,7 @@
         <p:spPr>
           <a:xfrm>
             <a:off x="274320" y="777240"/>
-            <a:ext cx="8595000" cy="2194200"/>
+            <a:ext cx="8594640" cy="2193840"/>
           </a:xfrm>
           <a:prstGeom prst="rect">
             <a:avLst/>
@@ -9385,6 +9839,11 @@
             <a:noAutofit/>
           </a:bodyPr>
           <a:p>
+            <a:pPr>
+              <a:lnSpc>
+                <a:spcPct val="100000"/>
+              </a:lnSpc>
+            </a:pPr>
             <a:endParaRPr b="0" lang="en-US" sz="1800" spc="-1" strike="noStrike">
               <a:solidFill>
                 <a:srgbClr val="ffffff"/>
@@ -9403,7 +9862,7 @@
         <p:spPr>
           <a:xfrm>
             <a:off x="274320" y="777240"/>
-            <a:ext cx="8595000" cy="456840"/>
+            <a:ext cx="8594640" cy="456480"/>
           </a:xfrm>
           <a:prstGeom prst="rect">
             <a:avLst/>
@@ -9429,6 +9888,11 @@
             <a:noAutofit/>
           </a:bodyPr>
           <a:p>
+            <a:pPr>
+              <a:lnSpc>
+                <a:spcPct val="100000"/>
+              </a:lnSpc>
+            </a:pPr>
             <a:endParaRPr b="0" lang="en-US" sz="1800" spc="-1" strike="noStrike">
               <a:solidFill>
                 <a:srgbClr val="ffffff"/>
@@ -9447,7 +9911,7 @@
         <p:spPr>
           <a:xfrm>
             <a:off x="457200" y="777240"/>
-            <a:ext cx="8229240" cy="456840"/>
+            <a:ext cx="8228880" cy="456480"/>
           </a:xfrm>
           <a:prstGeom prst="rect">
             <a:avLst/>
@@ -9512,7 +9976,7 @@
         <p:spPr>
           <a:xfrm>
             <a:off x="502920" y="1371600"/>
-            <a:ext cx="8229240" cy="1371240"/>
+            <a:ext cx="8228880" cy="1370880"/>
           </a:xfrm>
           <a:prstGeom prst="rect">
             <a:avLst/>
@@ -9569,7 +10033,7 @@
         <p:spPr>
           <a:xfrm>
             <a:off x="274320" y="3154680"/>
-            <a:ext cx="8595000" cy="319680"/>
+            <a:ext cx="8594640" cy="319320"/>
           </a:xfrm>
           <a:prstGeom prst="rect">
             <a:avLst/>
@@ -9599,7 +10063,7 @@
               </a:tabLst>
             </a:pPr>
             <a:r>
-              <a:rPr b="1" lang="en-US" sz="1100" spc="199" strike="noStrike">
+              <a:rPr b="1" lang="en-US" sz="1100" spc="197" strike="noStrike">
                 <a:solidFill>
                   <a:srgbClr val="0bc4c4"/>
                 </a:solidFill>
@@ -9625,7 +10089,7 @@
         <p:spPr>
           <a:xfrm>
             <a:off x="274320" y="3566160"/>
-            <a:ext cx="200880" cy="200880"/>
+            <a:ext cx="200520" cy="200520"/>
           </a:xfrm>
           <a:prstGeom prst="ellipse">
             <a:avLst/>
@@ -9651,6 +10115,11 @@
             <a:noAutofit/>
           </a:bodyPr>
           <a:p>
+            <a:pPr>
+              <a:lnSpc>
+                <a:spcPct val="100000"/>
+              </a:lnSpc>
+            </a:pPr>
             <a:endParaRPr b="0" lang="en-US" sz="1800" spc="-1" strike="noStrike">
               <a:solidFill>
                 <a:srgbClr val="000000"/>
@@ -9669,7 +10138,7 @@
         <p:spPr>
           <a:xfrm>
             <a:off x="594360" y="3529440"/>
-            <a:ext cx="8229240" cy="273960"/>
+            <a:ext cx="8228880" cy="273600"/>
           </a:xfrm>
           <a:prstGeom prst="rect">
             <a:avLst/>
@@ -9725,7 +10194,7 @@
         <p:spPr>
           <a:xfrm>
             <a:off x="274320" y="3931920"/>
-            <a:ext cx="200880" cy="200880"/>
+            <a:ext cx="200520" cy="200520"/>
           </a:xfrm>
           <a:prstGeom prst="ellipse">
             <a:avLst/>
@@ -9751,6 +10220,11 @@
             <a:noAutofit/>
           </a:bodyPr>
           <a:p>
+            <a:pPr>
+              <a:lnSpc>
+                <a:spcPct val="100000"/>
+              </a:lnSpc>
+            </a:pPr>
             <a:endParaRPr b="0" lang="en-US" sz="1800" spc="-1" strike="noStrike">
               <a:solidFill>
                 <a:srgbClr val="000000"/>
@@ -9769,7 +10243,7 @@
         <p:spPr>
           <a:xfrm>
             <a:off x="594360" y="3895200"/>
-            <a:ext cx="8229240" cy="273960"/>
+            <a:ext cx="8228880" cy="273600"/>
           </a:xfrm>
           <a:prstGeom prst="rect">
             <a:avLst/>
@@ -9825,7 +10299,7 @@
         <p:spPr>
           <a:xfrm>
             <a:off x="274320" y="4297680"/>
-            <a:ext cx="200880" cy="200880"/>
+            <a:ext cx="200520" cy="200520"/>
           </a:xfrm>
           <a:prstGeom prst="ellipse">
             <a:avLst/>
@@ -9851,6 +10325,11 @@
             <a:noAutofit/>
           </a:bodyPr>
           <a:p>
+            <a:pPr>
+              <a:lnSpc>
+                <a:spcPct val="100000"/>
+              </a:lnSpc>
+            </a:pPr>
             <a:endParaRPr b="0" lang="en-US" sz="1800" spc="-1" strike="noStrike">
               <a:solidFill>
                 <a:srgbClr val="000000"/>
@@ -9869,7 +10348,7 @@
         <p:spPr>
           <a:xfrm>
             <a:off x="594360" y="4260960"/>
-            <a:ext cx="8229240" cy="273960"/>
+            <a:ext cx="8228880" cy="273600"/>
           </a:xfrm>
           <a:prstGeom prst="rect">
             <a:avLst/>
@@ -9925,7 +10404,7 @@
         <p:spPr>
           <a:xfrm>
             <a:off x="8503920" y="4846320"/>
-            <a:ext cx="456840" cy="182520"/>
+            <a:ext cx="456480" cy="182160"/>
           </a:xfrm>
           <a:prstGeom prst="rect">
             <a:avLst/>
@@ -10018,7 +10497,7 @@
         <p:spPr>
           <a:xfrm>
             <a:off x="0" y="0"/>
-            <a:ext cx="9143640" cy="594000"/>
+            <a:ext cx="9143280" cy="593640"/>
           </a:xfrm>
           <a:prstGeom prst="rect">
             <a:avLst/>
@@ -10044,6 +10523,11 @@
             <a:noAutofit/>
           </a:bodyPr>
           <a:p>
+            <a:pPr>
+              <a:lnSpc>
+                <a:spcPct val="100000"/>
+              </a:lnSpc>
+            </a:pPr>
             <a:endParaRPr b="0" lang="en-US" sz="1800" spc="-1" strike="noStrike">
               <a:solidFill>
                 <a:srgbClr val="ffffff"/>
@@ -10062,7 +10546,7 @@
         <p:spPr>
           <a:xfrm>
             <a:off x="365760" y="0"/>
-            <a:ext cx="8229240" cy="594000"/>
+            <a:ext cx="8228880" cy="593640"/>
           </a:xfrm>
           <a:prstGeom prst="rect">
             <a:avLst/>
@@ -10092,7 +10576,7 @@
               </a:tabLst>
             </a:pPr>
             <a:r>
-              <a:rPr b="1" lang="en-US" sz="1400" spc="299" strike="noStrike">
+              <a:rPr b="1" lang="en-US" sz="1400" spc="296" strike="noStrike">
                 <a:solidFill>
                   <a:srgbClr val="0bc4c4"/>
                 </a:solidFill>
@@ -10118,7 +10602,7 @@
         <p:spPr>
           <a:xfrm>
             <a:off x="274320" y="777240"/>
-            <a:ext cx="2285640" cy="411120"/>
+            <a:ext cx="2285280" cy="410760"/>
           </a:xfrm>
           <a:prstGeom prst="rect">
             <a:avLst/>
@@ -10144,6 +10628,11 @@
             <a:noAutofit/>
           </a:bodyPr>
           <a:p>
+            <a:pPr>
+              <a:lnSpc>
+                <a:spcPct val="100000"/>
+              </a:lnSpc>
+            </a:pPr>
             <a:endParaRPr b="0" lang="en-US" sz="1800" spc="-1" strike="noStrike">
               <a:solidFill>
                 <a:srgbClr val="ffffff"/>
@@ -10162,7 +10651,7 @@
         <p:spPr>
           <a:xfrm>
             <a:off x="274320" y="777240"/>
-            <a:ext cx="2285640" cy="411120"/>
+            <a:ext cx="2285280" cy="410760"/>
           </a:xfrm>
           <a:prstGeom prst="rect">
             <a:avLst/>
@@ -10218,7 +10707,7 @@
         <p:spPr>
           <a:xfrm>
             <a:off x="2560320" y="777240"/>
-            <a:ext cx="2285640" cy="411120"/>
+            <a:ext cx="2285280" cy="410760"/>
           </a:xfrm>
           <a:prstGeom prst="rect">
             <a:avLst/>
@@ -10244,6 +10733,11 @@
             <a:noAutofit/>
           </a:bodyPr>
           <a:p>
+            <a:pPr>
+              <a:lnSpc>
+                <a:spcPct val="100000"/>
+              </a:lnSpc>
+            </a:pPr>
             <a:endParaRPr b="0" lang="en-US" sz="1800" spc="-1" strike="noStrike">
               <a:solidFill>
                 <a:srgbClr val="ffffff"/>
@@ -10262,7 +10756,7 @@
         <p:spPr>
           <a:xfrm>
             <a:off x="2560320" y="777240"/>
-            <a:ext cx="2285640" cy="411120"/>
+            <a:ext cx="2285280" cy="410760"/>
           </a:xfrm>
           <a:prstGeom prst="rect">
             <a:avLst/>
@@ -10318,7 +10812,7 @@
         <p:spPr>
           <a:xfrm>
             <a:off x="4846320" y="777240"/>
-            <a:ext cx="2011320" cy="411120"/>
+            <a:ext cx="2010960" cy="410760"/>
           </a:xfrm>
           <a:prstGeom prst="rect">
             <a:avLst/>
@@ -10344,6 +10838,11 @@
             <a:noAutofit/>
           </a:bodyPr>
           <a:p>
+            <a:pPr>
+              <a:lnSpc>
+                <a:spcPct val="100000"/>
+              </a:lnSpc>
+            </a:pPr>
             <a:endParaRPr b="0" lang="en-US" sz="1800" spc="-1" strike="noStrike">
               <a:solidFill>
                 <a:srgbClr val="ffffff"/>
@@ -10362,7 +10861,7 @@
         <p:spPr>
           <a:xfrm>
             <a:off x="4846320" y="777240"/>
-            <a:ext cx="2011320" cy="411120"/>
+            <a:ext cx="2010960" cy="410760"/>
           </a:xfrm>
           <a:prstGeom prst="rect">
             <a:avLst/>
@@ -10418,7 +10917,7 @@
         <p:spPr>
           <a:xfrm>
             <a:off x="6858000" y="777240"/>
-            <a:ext cx="2011320" cy="411120"/>
+            <a:ext cx="2010960" cy="410760"/>
           </a:xfrm>
           <a:prstGeom prst="rect">
             <a:avLst/>
@@ -10444,6 +10943,11 @@
             <a:noAutofit/>
           </a:bodyPr>
           <a:p>
+            <a:pPr>
+              <a:lnSpc>
+                <a:spcPct val="100000"/>
+              </a:lnSpc>
+            </a:pPr>
             <a:endParaRPr b="0" lang="en-US" sz="1800" spc="-1" strike="noStrike">
               <a:solidFill>
                 <a:srgbClr val="ffffff"/>
@@ -10462,7 +10966,7 @@
         <p:spPr>
           <a:xfrm>
             <a:off x="6858000" y="777240"/>
-            <a:ext cx="2011320" cy="411120"/>
+            <a:ext cx="2010960" cy="410760"/>
           </a:xfrm>
           <a:prstGeom prst="rect">
             <a:avLst/>
@@ -10518,7 +11022,7 @@
         <p:spPr>
           <a:xfrm>
             <a:off x="274320" y="1188720"/>
-            <a:ext cx="2285640" cy="529920"/>
+            <a:ext cx="2285280" cy="529560"/>
           </a:xfrm>
           <a:prstGeom prst="rect">
             <a:avLst/>
@@ -10544,6 +11048,11 @@
             <a:noAutofit/>
           </a:bodyPr>
           <a:p>
+            <a:pPr>
+              <a:lnSpc>
+                <a:spcPct val="100000"/>
+              </a:lnSpc>
+            </a:pPr>
             <a:endParaRPr b="0" lang="en-US" sz="1800" spc="-1" strike="noStrike">
               <a:solidFill>
                 <a:srgbClr val="ffffff"/>
@@ -10562,7 +11071,7 @@
         <p:spPr>
           <a:xfrm>
             <a:off x="365760" y="1188720"/>
-            <a:ext cx="2148480" cy="529920"/>
+            <a:ext cx="2148120" cy="529560"/>
           </a:xfrm>
           <a:prstGeom prst="rect">
             <a:avLst/>
@@ -10618,7 +11127,7 @@
         <p:spPr>
           <a:xfrm>
             <a:off x="2560320" y="1188720"/>
-            <a:ext cx="2285640" cy="529920"/>
+            <a:ext cx="2285280" cy="529560"/>
           </a:xfrm>
           <a:prstGeom prst="rect">
             <a:avLst/>
@@ -10644,6 +11153,11 @@
             <a:noAutofit/>
           </a:bodyPr>
           <a:p>
+            <a:pPr>
+              <a:lnSpc>
+                <a:spcPct val="100000"/>
+              </a:lnSpc>
+            </a:pPr>
             <a:endParaRPr b="0" lang="en-US" sz="1800" spc="-1" strike="noStrike">
               <a:solidFill>
                 <a:srgbClr val="ffffff"/>
@@ -10662,7 +11176,7 @@
         <p:spPr>
           <a:xfrm>
             <a:off x="2651760" y="1188720"/>
-            <a:ext cx="2148480" cy="529920"/>
+            <a:ext cx="2148120" cy="529560"/>
           </a:xfrm>
           <a:prstGeom prst="rect">
             <a:avLst/>
@@ -10718,7 +11232,7 @@
         <p:spPr>
           <a:xfrm>
             <a:off x="4846320" y="1188720"/>
-            <a:ext cx="2011320" cy="529920"/>
+            <a:ext cx="2010960" cy="529560"/>
           </a:xfrm>
           <a:prstGeom prst="rect">
             <a:avLst/>
@@ -10744,6 +11258,11 @@
             <a:noAutofit/>
           </a:bodyPr>
           <a:p>
+            <a:pPr>
+              <a:lnSpc>
+                <a:spcPct val="100000"/>
+              </a:lnSpc>
+            </a:pPr>
             <a:endParaRPr b="0" lang="en-US" sz="1800" spc="-1" strike="noStrike">
               <a:solidFill>
                 <a:srgbClr val="ffffff"/>
@@ -10762,7 +11281,7 @@
         <p:spPr>
           <a:xfrm>
             <a:off x="4937760" y="1188720"/>
-            <a:ext cx="1874160" cy="529920"/>
+            <a:ext cx="1873800" cy="529560"/>
           </a:xfrm>
           <a:prstGeom prst="rect">
             <a:avLst/>
@@ -10818,7 +11337,7 @@
         <p:spPr>
           <a:xfrm>
             <a:off x="6858000" y="1188720"/>
-            <a:ext cx="2011320" cy="529920"/>
+            <a:ext cx="2010960" cy="529560"/>
           </a:xfrm>
           <a:prstGeom prst="rect">
             <a:avLst/>
@@ -10844,6 +11363,11 @@
             <a:noAutofit/>
           </a:bodyPr>
           <a:p>
+            <a:pPr>
+              <a:lnSpc>
+                <a:spcPct val="100000"/>
+              </a:lnSpc>
+            </a:pPr>
             <a:endParaRPr b="0" lang="en-US" sz="1800" spc="-1" strike="noStrike">
               <a:solidFill>
                 <a:srgbClr val="ffffff"/>
@@ -10862,7 +11386,7 @@
         <p:spPr>
           <a:xfrm>
             <a:off x="6949440" y="1188720"/>
-            <a:ext cx="1874160" cy="529920"/>
+            <a:ext cx="1873800" cy="529560"/>
           </a:xfrm>
           <a:prstGeom prst="rect">
             <a:avLst/>
@@ -10918,7 +11442,7 @@
         <p:spPr>
           <a:xfrm>
             <a:off x="274320" y="1755720"/>
-            <a:ext cx="2285640" cy="529920"/>
+            <a:ext cx="2285280" cy="529560"/>
           </a:xfrm>
           <a:prstGeom prst="rect">
             <a:avLst/>
@@ -10944,6 +11468,11 @@
             <a:noAutofit/>
           </a:bodyPr>
           <a:p>
+            <a:pPr>
+              <a:lnSpc>
+                <a:spcPct val="100000"/>
+              </a:lnSpc>
+            </a:pPr>
             <a:endParaRPr b="0" lang="en-US" sz="1800" spc="-1" strike="noStrike">
               <a:solidFill>
                 <a:srgbClr val="ffffff"/>
@@ -10962,7 +11491,7 @@
         <p:spPr>
           <a:xfrm>
             <a:off x="365760" y="1755720"/>
-            <a:ext cx="2148480" cy="529920"/>
+            <a:ext cx="2148120" cy="529560"/>
           </a:xfrm>
           <a:prstGeom prst="rect">
             <a:avLst/>
@@ -11018,7 +11547,7 @@
         <p:spPr>
           <a:xfrm>
             <a:off x="2560320" y="1755720"/>
-            <a:ext cx="2285640" cy="529920"/>
+            <a:ext cx="2285280" cy="529560"/>
           </a:xfrm>
           <a:prstGeom prst="rect">
             <a:avLst/>
@@ -11044,6 +11573,11 @@
             <a:noAutofit/>
           </a:bodyPr>
           <a:p>
+            <a:pPr>
+              <a:lnSpc>
+                <a:spcPct val="100000"/>
+              </a:lnSpc>
+            </a:pPr>
             <a:endParaRPr b="0" lang="en-US" sz="1800" spc="-1" strike="noStrike">
               <a:solidFill>
                 <a:srgbClr val="ffffff"/>
@@ -11062,7 +11596,7 @@
         <p:spPr>
           <a:xfrm>
             <a:off x="2651760" y="1755720"/>
-            <a:ext cx="2148480" cy="529920"/>
+            <a:ext cx="2148120" cy="529560"/>
           </a:xfrm>
           <a:prstGeom prst="rect">
             <a:avLst/>
@@ -11118,7 +11652,7 @@
         <p:spPr>
           <a:xfrm>
             <a:off x="4846320" y="1755720"/>
-            <a:ext cx="2011320" cy="529920"/>
+            <a:ext cx="2010960" cy="529560"/>
           </a:xfrm>
           <a:prstGeom prst="rect">
             <a:avLst/>
@@ -11144,6 +11678,11 @@
             <a:noAutofit/>
           </a:bodyPr>
           <a:p>
+            <a:pPr>
+              <a:lnSpc>
+                <a:spcPct val="100000"/>
+              </a:lnSpc>
+            </a:pPr>
             <a:endParaRPr b="0" lang="en-US" sz="1800" spc="-1" strike="noStrike">
               <a:solidFill>
                 <a:srgbClr val="ffffff"/>
@@ -11162,7 +11701,7 @@
         <p:spPr>
           <a:xfrm>
             <a:off x="4937760" y="1755720"/>
-            <a:ext cx="1874160" cy="529920"/>
+            <a:ext cx="1873800" cy="529560"/>
           </a:xfrm>
           <a:prstGeom prst="rect">
             <a:avLst/>
@@ -11218,7 +11757,7 @@
         <p:spPr>
           <a:xfrm>
             <a:off x="6858000" y="1755720"/>
-            <a:ext cx="2011320" cy="529920"/>
+            <a:ext cx="2010960" cy="529560"/>
           </a:xfrm>
           <a:prstGeom prst="rect">
             <a:avLst/>
@@ -11244,6 +11783,11 @@
             <a:noAutofit/>
           </a:bodyPr>
           <a:p>
+            <a:pPr>
+              <a:lnSpc>
+                <a:spcPct val="100000"/>
+              </a:lnSpc>
+            </a:pPr>
             <a:endParaRPr b="0" lang="en-US" sz="1800" spc="-1" strike="noStrike">
               <a:solidFill>
                 <a:srgbClr val="ffffff"/>
@@ -11262,7 +11806,7 @@
         <p:spPr>
           <a:xfrm>
             <a:off x="6949440" y="1755720"/>
-            <a:ext cx="1874160" cy="529920"/>
+            <a:ext cx="1873800" cy="529560"/>
           </a:xfrm>
           <a:prstGeom prst="rect">
             <a:avLst/>
@@ -11318,7 +11862,7 @@
         <p:spPr>
           <a:xfrm>
             <a:off x="274320" y="2322720"/>
-            <a:ext cx="2285640" cy="529920"/>
+            <a:ext cx="2285280" cy="529560"/>
           </a:xfrm>
           <a:prstGeom prst="rect">
             <a:avLst/>
@@ -11344,6 +11888,11 @@
             <a:noAutofit/>
           </a:bodyPr>
           <a:p>
+            <a:pPr>
+              <a:lnSpc>
+                <a:spcPct val="100000"/>
+              </a:lnSpc>
+            </a:pPr>
             <a:endParaRPr b="0" lang="en-US" sz="1800" spc="-1" strike="noStrike">
               <a:solidFill>
                 <a:srgbClr val="ffffff"/>
@@ -11362,7 +11911,7 @@
         <p:spPr>
           <a:xfrm>
             <a:off x="365760" y="2322720"/>
-            <a:ext cx="2148480" cy="529920"/>
+            <a:ext cx="2148120" cy="529560"/>
           </a:xfrm>
           <a:prstGeom prst="rect">
             <a:avLst/>
@@ -11418,7 +11967,7 @@
         <p:spPr>
           <a:xfrm>
             <a:off x="2560320" y="2322720"/>
-            <a:ext cx="2285640" cy="529920"/>
+            <a:ext cx="2285280" cy="529560"/>
           </a:xfrm>
           <a:prstGeom prst="rect">
             <a:avLst/>
@@ -11444,6 +11993,11 @@
             <a:noAutofit/>
           </a:bodyPr>
           <a:p>
+            <a:pPr>
+              <a:lnSpc>
+                <a:spcPct val="100000"/>
+              </a:lnSpc>
+            </a:pPr>
             <a:endParaRPr b="0" lang="en-US" sz="1800" spc="-1" strike="noStrike">
               <a:solidFill>
                 <a:srgbClr val="ffffff"/>
@@ -11462,7 +12016,7 @@
         <p:spPr>
           <a:xfrm>
             <a:off x="2651760" y="2322720"/>
-            <a:ext cx="2148480" cy="529920"/>
+            <a:ext cx="2148120" cy="529560"/>
           </a:xfrm>
           <a:prstGeom prst="rect">
             <a:avLst/>
@@ -11518,7 +12072,7 @@
         <p:spPr>
           <a:xfrm>
             <a:off x="4846320" y="2322720"/>
-            <a:ext cx="2011320" cy="529920"/>
+            <a:ext cx="2010960" cy="529560"/>
           </a:xfrm>
           <a:prstGeom prst="rect">
             <a:avLst/>
@@ -11544,6 +12098,11 @@
             <a:noAutofit/>
           </a:bodyPr>
           <a:p>
+            <a:pPr>
+              <a:lnSpc>
+                <a:spcPct val="100000"/>
+              </a:lnSpc>
+            </a:pPr>
             <a:endParaRPr b="0" lang="en-US" sz="1800" spc="-1" strike="noStrike">
               <a:solidFill>
                 <a:srgbClr val="ffffff"/>
@@ -11562,7 +12121,7 @@
         <p:spPr>
           <a:xfrm>
             <a:off x="4937760" y="2322720"/>
-            <a:ext cx="1874160" cy="529920"/>
+            <a:ext cx="1873800" cy="529560"/>
           </a:xfrm>
           <a:prstGeom prst="rect">
             <a:avLst/>
@@ -11618,7 +12177,7 @@
         <p:spPr>
           <a:xfrm>
             <a:off x="6858000" y="2322720"/>
-            <a:ext cx="2011320" cy="529920"/>
+            <a:ext cx="2010960" cy="529560"/>
           </a:xfrm>
           <a:prstGeom prst="rect">
             <a:avLst/>
@@ -11644,6 +12203,11 @@
             <a:noAutofit/>
           </a:bodyPr>
           <a:p>
+            <a:pPr>
+              <a:lnSpc>
+                <a:spcPct val="100000"/>
+              </a:lnSpc>
+            </a:pPr>
             <a:endParaRPr b="0" lang="en-US" sz="1800" spc="-1" strike="noStrike">
               <a:solidFill>
                 <a:srgbClr val="ffffff"/>
@@ -11662,7 +12226,7 @@
         <p:spPr>
           <a:xfrm>
             <a:off x="6949440" y="2322720"/>
-            <a:ext cx="1874160" cy="529920"/>
+            <a:ext cx="1873800" cy="529560"/>
           </a:xfrm>
           <a:prstGeom prst="rect">
             <a:avLst/>
@@ -11718,7 +12282,7 @@
         <p:spPr>
           <a:xfrm>
             <a:off x="274320" y="2889360"/>
-            <a:ext cx="2285640" cy="529920"/>
+            <a:ext cx="2285280" cy="529560"/>
           </a:xfrm>
           <a:prstGeom prst="rect">
             <a:avLst/>
@@ -11744,6 +12308,11 @@
             <a:noAutofit/>
           </a:bodyPr>
           <a:p>
+            <a:pPr>
+              <a:lnSpc>
+                <a:spcPct val="100000"/>
+              </a:lnSpc>
+            </a:pPr>
             <a:endParaRPr b="0" lang="en-US" sz="1800" spc="-1" strike="noStrike">
               <a:solidFill>
                 <a:srgbClr val="ffffff"/>
@@ -11762,7 +12331,7 @@
         <p:spPr>
           <a:xfrm>
             <a:off x="365760" y="2889360"/>
-            <a:ext cx="2148480" cy="529920"/>
+            <a:ext cx="2148120" cy="529560"/>
           </a:xfrm>
           <a:prstGeom prst="rect">
             <a:avLst/>
@@ -11818,7 +12387,7 @@
         <p:spPr>
           <a:xfrm>
             <a:off x="2560320" y="2889360"/>
-            <a:ext cx="2285640" cy="529920"/>
+            <a:ext cx="2285280" cy="529560"/>
           </a:xfrm>
           <a:prstGeom prst="rect">
             <a:avLst/>
@@ -11844,6 +12413,11 @@
             <a:noAutofit/>
           </a:bodyPr>
           <a:p>
+            <a:pPr>
+              <a:lnSpc>
+                <a:spcPct val="100000"/>
+              </a:lnSpc>
+            </a:pPr>
             <a:endParaRPr b="0" lang="en-US" sz="1800" spc="-1" strike="noStrike">
               <a:solidFill>
                 <a:srgbClr val="ffffff"/>
@@ -11862,7 +12436,7 @@
         <p:spPr>
           <a:xfrm>
             <a:off x="2651760" y="2889360"/>
-            <a:ext cx="2148480" cy="529920"/>
+            <a:ext cx="2148120" cy="529560"/>
           </a:xfrm>
           <a:prstGeom prst="rect">
             <a:avLst/>
@@ -11918,7 +12492,7 @@
         <p:spPr>
           <a:xfrm>
             <a:off x="4846320" y="2889360"/>
-            <a:ext cx="2011320" cy="529920"/>
+            <a:ext cx="2010960" cy="529560"/>
           </a:xfrm>
           <a:prstGeom prst="rect">
             <a:avLst/>
@@ -11944,6 +12518,11 @@
             <a:noAutofit/>
           </a:bodyPr>
           <a:p>
+            <a:pPr>
+              <a:lnSpc>
+                <a:spcPct val="100000"/>
+              </a:lnSpc>
+            </a:pPr>
             <a:endParaRPr b="0" lang="en-US" sz="1800" spc="-1" strike="noStrike">
               <a:solidFill>
                 <a:srgbClr val="ffffff"/>
@@ -11962,7 +12541,7 @@
         <p:spPr>
           <a:xfrm>
             <a:off x="4937760" y="2889360"/>
-            <a:ext cx="1874160" cy="529920"/>
+            <a:ext cx="1873800" cy="529560"/>
           </a:xfrm>
           <a:prstGeom prst="rect">
             <a:avLst/>
@@ -12018,7 +12597,7 @@
         <p:spPr>
           <a:xfrm>
             <a:off x="6858000" y="2889360"/>
-            <a:ext cx="2011320" cy="529920"/>
+            <a:ext cx="2010960" cy="529560"/>
           </a:xfrm>
           <a:prstGeom prst="rect">
             <a:avLst/>
@@ -12044,6 +12623,11 @@
             <a:noAutofit/>
           </a:bodyPr>
           <a:p>
+            <a:pPr>
+              <a:lnSpc>
+                <a:spcPct val="100000"/>
+              </a:lnSpc>
+            </a:pPr>
             <a:endParaRPr b="0" lang="en-US" sz="1800" spc="-1" strike="noStrike">
               <a:solidFill>
                 <a:srgbClr val="ffffff"/>
@@ -12062,7 +12646,7 @@
         <p:spPr>
           <a:xfrm>
             <a:off x="6949440" y="2889360"/>
-            <a:ext cx="1874160" cy="529920"/>
+            <a:ext cx="1873800" cy="529560"/>
           </a:xfrm>
           <a:prstGeom prst="rect">
             <a:avLst/>
@@ -12118,7 +12702,7 @@
         <p:spPr>
           <a:xfrm>
             <a:off x="274320" y="3456360"/>
-            <a:ext cx="2285640" cy="529920"/>
+            <a:ext cx="2285280" cy="529560"/>
           </a:xfrm>
           <a:prstGeom prst="rect">
             <a:avLst/>
@@ -12144,6 +12728,11 @@
             <a:noAutofit/>
           </a:bodyPr>
           <a:p>
+            <a:pPr>
+              <a:lnSpc>
+                <a:spcPct val="100000"/>
+              </a:lnSpc>
+            </a:pPr>
             <a:endParaRPr b="0" lang="en-US" sz="1800" spc="-1" strike="noStrike">
               <a:solidFill>
                 <a:srgbClr val="ffffff"/>
@@ -12162,7 +12751,7 @@
         <p:spPr>
           <a:xfrm>
             <a:off x="365760" y="3456360"/>
-            <a:ext cx="2148480" cy="529920"/>
+            <a:ext cx="2148120" cy="529560"/>
           </a:xfrm>
           <a:prstGeom prst="rect">
             <a:avLst/>
@@ -12218,7 +12807,7 @@
         <p:spPr>
           <a:xfrm>
             <a:off x="2560320" y="3456360"/>
-            <a:ext cx="2285640" cy="529920"/>
+            <a:ext cx="2285280" cy="529560"/>
           </a:xfrm>
           <a:prstGeom prst="rect">
             <a:avLst/>
@@ -12244,6 +12833,11 @@
             <a:noAutofit/>
           </a:bodyPr>
           <a:p>
+            <a:pPr>
+              <a:lnSpc>
+                <a:spcPct val="100000"/>
+              </a:lnSpc>
+            </a:pPr>
             <a:endParaRPr b="0" lang="en-US" sz="1800" spc="-1" strike="noStrike">
               <a:solidFill>
                 <a:srgbClr val="ffffff"/>
@@ -12262,7 +12856,7 @@
         <p:spPr>
           <a:xfrm>
             <a:off x="2651760" y="3456360"/>
-            <a:ext cx="2148480" cy="529920"/>
+            <a:ext cx="2148120" cy="529560"/>
           </a:xfrm>
           <a:prstGeom prst="rect">
             <a:avLst/>
@@ -12318,7 +12912,7 @@
         <p:spPr>
           <a:xfrm>
             <a:off x="4846320" y="3456360"/>
-            <a:ext cx="2011320" cy="529920"/>
+            <a:ext cx="2010960" cy="529560"/>
           </a:xfrm>
           <a:prstGeom prst="rect">
             <a:avLst/>
@@ -12344,6 +12938,11 @@
             <a:noAutofit/>
           </a:bodyPr>
           <a:p>
+            <a:pPr>
+              <a:lnSpc>
+                <a:spcPct val="100000"/>
+              </a:lnSpc>
+            </a:pPr>
             <a:endParaRPr b="0" lang="en-US" sz="1800" spc="-1" strike="noStrike">
               <a:solidFill>
                 <a:srgbClr val="ffffff"/>
@@ -12362,7 +12961,7 @@
         <p:spPr>
           <a:xfrm>
             <a:off x="4937760" y="3456360"/>
-            <a:ext cx="1874160" cy="529920"/>
+            <a:ext cx="1873800" cy="529560"/>
           </a:xfrm>
           <a:prstGeom prst="rect">
             <a:avLst/>
@@ -12418,7 +13017,7 @@
         <p:spPr>
           <a:xfrm>
             <a:off x="6858000" y="3456360"/>
-            <a:ext cx="2011320" cy="529920"/>
+            <a:ext cx="2010960" cy="529560"/>
           </a:xfrm>
           <a:prstGeom prst="rect">
             <a:avLst/>
@@ -12444,6 +13043,11 @@
             <a:noAutofit/>
           </a:bodyPr>
           <a:p>
+            <a:pPr>
+              <a:lnSpc>
+                <a:spcPct val="100000"/>
+              </a:lnSpc>
+            </a:pPr>
             <a:endParaRPr b="0" lang="en-US" sz="1800" spc="-1" strike="noStrike">
               <a:solidFill>
                 <a:srgbClr val="ffffff"/>
@@ -12462,7 +13066,7 @@
         <p:spPr>
           <a:xfrm>
             <a:off x="6949440" y="3456360"/>
-            <a:ext cx="1874160" cy="529920"/>
+            <a:ext cx="1873800" cy="529560"/>
           </a:xfrm>
           <a:prstGeom prst="rect">
             <a:avLst/>
@@ -12518,7 +13122,7 @@
         <p:spPr>
           <a:xfrm>
             <a:off x="274320" y="4023360"/>
-            <a:ext cx="2285640" cy="529920"/>
+            <a:ext cx="2285280" cy="529560"/>
           </a:xfrm>
           <a:prstGeom prst="rect">
             <a:avLst/>
@@ -12544,6 +13148,11 @@
             <a:noAutofit/>
           </a:bodyPr>
           <a:p>
+            <a:pPr>
+              <a:lnSpc>
+                <a:spcPct val="100000"/>
+              </a:lnSpc>
+            </a:pPr>
             <a:endParaRPr b="0" lang="en-US" sz="1800" spc="-1" strike="noStrike">
               <a:solidFill>
                 <a:srgbClr val="ffffff"/>
@@ -12562,7 +13171,7 @@
         <p:spPr>
           <a:xfrm>
             <a:off x="365760" y="4023360"/>
-            <a:ext cx="2148480" cy="529920"/>
+            <a:ext cx="2148120" cy="529560"/>
           </a:xfrm>
           <a:prstGeom prst="rect">
             <a:avLst/>
@@ -12618,7 +13227,7 @@
         <p:spPr>
           <a:xfrm>
             <a:off x="2560320" y="4023360"/>
-            <a:ext cx="2285640" cy="529920"/>
+            <a:ext cx="2285280" cy="529560"/>
           </a:xfrm>
           <a:prstGeom prst="rect">
             <a:avLst/>
@@ -12644,6 +13253,11 @@
             <a:noAutofit/>
           </a:bodyPr>
           <a:p>
+            <a:pPr>
+              <a:lnSpc>
+                <a:spcPct val="100000"/>
+              </a:lnSpc>
+            </a:pPr>
             <a:endParaRPr b="0" lang="en-US" sz="1800" spc="-1" strike="noStrike">
               <a:solidFill>
                 <a:srgbClr val="ffffff"/>
@@ -12662,7 +13276,7 @@
         <p:spPr>
           <a:xfrm>
             <a:off x="2651760" y="4023360"/>
-            <a:ext cx="2148480" cy="529920"/>
+            <a:ext cx="2148120" cy="529560"/>
           </a:xfrm>
           <a:prstGeom prst="rect">
             <a:avLst/>
@@ -12718,7 +13332,7 @@
         <p:spPr>
           <a:xfrm>
             <a:off x="4846320" y="4023360"/>
-            <a:ext cx="2011320" cy="529920"/>
+            <a:ext cx="2010960" cy="529560"/>
           </a:xfrm>
           <a:prstGeom prst="rect">
             <a:avLst/>
@@ -12744,6 +13358,11 @@
             <a:noAutofit/>
           </a:bodyPr>
           <a:p>
+            <a:pPr>
+              <a:lnSpc>
+                <a:spcPct val="100000"/>
+              </a:lnSpc>
+            </a:pPr>
             <a:endParaRPr b="0" lang="en-US" sz="1800" spc="-1" strike="noStrike">
               <a:solidFill>
                 <a:srgbClr val="ffffff"/>
@@ -12762,7 +13381,7 @@
         <p:spPr>
           <a:xfrm>
             <a:off x="4937760" y="4023360"/>
-            <a:ext cx="1874160" cy="529920"/>
+            <a:ext cx="1873800" cy="529560"/>
           </a:xfrm>
           <a:prstGeom prst="rect">
             <a:avLst/>
@@ -12818,7 +13437,7 @@
         <p:spPr>
           <a:xfrm>
             <a:off x="6858000" y="4023360"/>
-            <a:ext cx="2011320" cy="529920"/>
+            <a:ext cx="2010960" cy="529560"/>
           </a:xfrm>
           <a:prstGeom prst="rect">
             <a:avLst/>
@@ -12844,6 +13463,11 @@
             <a:noAutofit/>
           </a:bodyPr>
           <a:p>
+            <a:pPr>
+              <a:lnSpc>
+                <a:spcPct val="100000"/>
+              </a:lnSpc>
+            </a:pPr>
             <a:endParaRPr b="0" lang="en-US" sz="1800" spc="-1" strike="noStrike">
               <a:solidFill>
                 <a:srgbClr val="ffffff"/>
@@ -12862,7 +13486,7 @@
         <p:spPr>
           <a:xfrm>
             <a:off x="6949440" y="4023360"/>
-            <a:ext cx="1874160" cy="529920"/>
+            <a:ext cx="1873800" cy="529560"/>
           </a:xfrm>
           <a:prstGeom prst="rect">
             <a:avLst/>
@@ -12918,7 +13542,7 @@
         <p:spPr>
           <a:xfrm>
             <a:off x="8503920" y="4846320"/>
-            <a:ext cx="456840" cy="182520"/>
+            <a:ext cx="456480" cy="182160"/>
           </a:xfrm>
           <a:prstGeom prst="rect">
             <a:avLst/>
@@ -13011,7 +13635,7 @@
         <p:spPr>
           <a:xfrm>
             <a:off x="0" y="0"/>
-            <a:ext cx="9143640" cy="5143320"/>
+            <a:ext cx="9143280" cy="5142960"/>
           </a:xfrm>
           <a:prstGeom prst="rect">
             <a:avLst/>
@@ -13037,6 +13661,11 @@
             <a:noAutofit/>
           </a:bodyPr>
           <a:p>
+            <a:pPr>
+              <a:lnSpc>
+                <a:spcPct val="100000"/>
+              </a:lnSpc>
+            </a:pPr>
             <a:endParaRPr b="0" lang="en-US" sz="1800" spc="-1" strike="noStrike">
               <a:solidFill>
                 <a:srgbClr val="ffffff"/>
@@ -13055,7 +13684,7 @@
         <p:spPr>
           <a:xfrm>
             <a:off x="274320" y="182880"/>
-            <a:ext cx="72720" cy="72720"/>
+            <a:ext cx="72360" cy="72360"/>
           </a:xfrm>
           <a:prstGeom prst="ellipse">
             <a:avLst/>
@@ -13083,6 +13712,11 @@
             <a:noAutofit/>
           </a:bodyPr>
           <a:p>
+            <a:pPr>
+              <a:lnSpc>
+                <a:spcPct val="100000"/>
+              </a:lnSpc>
+            </a:pPr>
             <a:endParaRPr b="0" lang="en-US" sz="1800" spc="-1" strike="noStrike">
               <a:solidFill>
                 <a:srgbClr val="ffffff"/>
@@ -13101,7 +13735,7 @@
         <p:spPr>
           <a:xfrm>
             <a:off x="1371600" y="182880"/>
-            <a:ext cx="72720" cy="72720"/>
+            <a:ext cx="72360" cy="72360"/>
           </a:xfrm>
           <a:prstGeom prst="ellipse">
             <a:avLst/>
@@ -13129,6 +13763,11 @@
             <a:noAutofit/>
           </a:bodyPr>
           <a:p>
+            <a:pPr>
+              <a:lnSpc>
+                <a:spcPct val="100000"/>
+              </a:lnSpc>
+            </a:pPr>
             <a:endParaRPr b="0" lang="en-US" sz="1800" spc="-1" strike="noStrike">
               <a:solidFill>
                 <a:srgbClr val="ffffff"/>
@@ -13147,7 +13786,7 @@
         <p:spPr>
           <a:xfrm>
             <a:off x="2468880" y="182880"/>
-            <a:ext cx="72720" cy="72720"/>
+            <a:ext cx="72360" cy="72360"/>
           </a:xfrm>
           <a:prstGeom prst="ellipse">
             <a:avLst/>
@@ -13175,6 +13814,11 @@
             <a:noAutofit/>
           </a:bodyPr>
           <a:p>
+            <a:pPr>
+              <a:lnSpc>
+                <a:spcPct val="100000"/>
+              </a:lnSpc>
+            </a:pPr>
             <a:endParaRPr b="0" lang="en-US" sz="1800" spc="-1" strike="noStrike">
               <a:solidFill>
                 <a:srgbClr val="ffffff"/>
@@ -13193,7 +13837,7 @@
         <p:spPr>
           <a:xfrm>
             <a:off x="3566160" y="182880"/>
-            <a:ext cx="72720" cy="72720"/>
+            <a:ext cx="72360" cy="72360"/>
           </a:xfrm>
           <a:prstGeom prst="ellipse">
             <a:avLst/>
@@ -13221,6 +13865,11 @@
             <a:noAutofit/>
           </a:bodyPr>
           <a:p>
+            <a:pPr>
+              <a:lnSpc>
+                <a:spcPct val="100000"/>
+              </a:lnSpc>
+            </a:pPr>
             <a:endParaRPr b="0" lang="en-US" sz="1800" spc="-1" strike="noStrike">
               <a:solidFill>
                 <a:srgbClr val="ffffff"/>
@@ -13239,7 +13888,7 @@
         <p:spPr>
           <a:xfrm>
             <a:off x="4663440" y="182880"/>
-            <a:ext cx="72720" cy="72720"/>
+            <a:ext cx="72360" cy="72360"/>
           </a:xfrm>
           <a:prstGeom prst="ellipse">
             <a:avLst/>
@@ -13267,6 +13916,11 @@
             <a:noAutofit/>
           </a:bodyPr>
           <a:p>
+            <a:pPr>
+              <a:lnSpc>
+                <a:spcPct val="100000"/>
+              </a:lnSpc>
+            </a:pPr>
             <a:endParaRPr b="0" lang="en-US" sz="1800" spc="-1" strike="noStrike">
               <a:solidFill>
                 <a:srgbClr val="ffffff"/>
@@ -13285,7 +13939,7 @@
         <p:spPr>
           <a:xfrm>
             <a:off x="5760720" y="182880"/>
-            <a:ext cx="72720" cy="72720"/>
+            <a:ext cx="72360" cy="72360"/>
           </a:xfrm>
           <a:prstGeom prst="ellipse">
             <a:avLst/>
@@ -13313,6 +13967,11 @@
             <a:noAutofit/>
           </a:bodyPr>
           <a:p>
+            <a:pPr>
+              <a:lnSpc>
+                <a:spcPct val="100000"/>
+              </a:lnSpc>
+            </a:pPr>
             <a:endParaRPr b="0" lang="en-US" sz="1800" spc="-1" strike="noStrike">
               <a:solidFill>
                 <a:srgbClr val="ffffff"/>
@@ -13331,7 +13990,7 @@
         <p:spPr>
           <a:xfrm>
             <a:off x="6858000" y="182880"/>
-            <a:ext cx="72720" cy="72720"/>
+            <a:ext cx="72360" cy="72360"/>
           </a:xfrm>
           <a:prstGeom prst="ellipse">
             <a:avLst/>
@@ -13359,6 +14018,11 @@
             <a:noAutofit/>
           </a:bodyPr>
           <a:p>
+            <a:pPr>
+              <a:lnSpc>
+                <a:spcPct val="100000"/>
+              </a:lnSpc>
+            </a:pPr>
             <a:endParaRPr b="0" lang="en-US" sz="1800" spc="-1" strike="noStrike">
               <a:solidFill>
                 <a:srgbClr val="ffffff"/>
@@ -13377,7 +14041,7 @@
         <p:spPr>
           <a:xfrm>
             <a:off x="7955280" y="182880"/>
-            <a:ext cx="72720" cy="72720"/>
+            <a:ext cx="72360" cy="72360"/>
           </a:xfrm>
           <a:prstGeom prst="ellipse">
             <a:avLst/>
@@ -13405,6 +14069,11 @@
             <a:noAutofit/>
           </a:bodyPr>
           <a:p>
+            <a:pPr>
+              <a:lnSpc>
+                <a:spcPct val="100000"/>
+              </a:lnSpc>
+            </a:pPr>
             <a:endParaRPr b="0" lang="en-US" sz="1800" spc="-1" strike="noStrike">
               <a:solidFill>
                 <a:srgbClr val="ffffff"/>
@@ -13423,7 +14092,7 @@
         <p:spPr>
           <a:xfrm>
             <a:off x="274320" y="1097280"/>
-            <a:ext cx="72720" cy="72720"/>
+            <a:ext cx="72360" cy="72360"/>
           </a:xfrm>
           <a:prstGeom prst="ellipse">
             <a:avLst/>
@@ -13451,6 +14120,11 @@
             <a:noAutofit/>
           </a:bodyPr>
           <a:p>
+            <a:pPr>
+              <a:lnSpc>
+                <a:spcPct val="100000"/>
+              </a:lnSpc>
+            </a:pPr>
             <a:endParaRPr b="0" lang="en-US" sz="1800" spc="-1" strike="noStrike">
               <a:solidFill>
                 <a:srgbClr val="ffffff"/>
@@ -13469,7 +14143,7 @@
         <p:spPr>
           <a:xfrm>
             <a:off x="1371600" y="1097280"/>
-            <a:ext cx="72720" cy="72720"/>
+            <a:ext cx="72360" cy="72360"/>
           </a:xfrm>
           <a:prstGeom prst="ellipse">
             <a:avLst/>
@@ -13497,6 +14171,11 @@
             <a:noAutofit/>
           </a:bodyPr>
           <a:p>
+            <a:pPr>
+              <a:lnSpc>
+                <a:spcPct val="100000"/>
+              </a:lnSpc>
+            </a:pPr>
             <a:endParaRPr b="0" lang="en-US" sz="1800" spc="-1" strike="noStrike">
               <a:solidFill>
                 <a:srgbClr val="ffffff"/>
@@ -13515,7 +14194,7 @@
         <p:spPr>
           <a:xfrm>
             <a:off x="2468880" y="1097280"/>
-            <a:ext cx="72720" cy="72720"/>
+            <a:ext cx="72360" cy="72360"/>
           </a:xfrm>
           <a:prstGeom prst="ellipse">
             <a:avLst/>
@@ -13543,6 +14222,11 @@
             <a:noAutofit/>
           </a:bodyPr>
           <a:p>
+            <a:pPr>
+              <a:lnSpc>
+                <a:spcPct val="100000"/>
+              </a:lnSpc>
+            </a:pPr>
             <a:endParaRPr b="0" lang="en-US" sz="1800" spc="-1" strike="noStrike">
               <a:solidFill>
                 <a:srgbClr val="ffffff"/>
@@ -13561,7 +14245,7 @@
         <p:spPr>
           <a:xfrm>
             <a:off x="3566160" y="1097280"/>
-            <a:ext cx="72720" cy="72720"/>
+            <a:ext cx="72360" cy="72360"/>
           </a:xfrm>
           <a:prstGeom prst="ellipse">
             <a:avLst/>
@@ -13589,6 +14273,11 @@
             <a:noAutofit/>
           </a:bodyPr>
           <a:p>
+            <a:pPr>
+              <a:lnSpc>
+                <a:spcPct val="100000"/>
+              </a:lnSpc>
+            </a:pPr>
             <a:endParaRPr b="0" lang="en-US" sz="1800" spc="-1" strike="noStrike">
               <a:solidFill>
                 <a:srgbClr val="ffffff"/>
@@ -13607,7 +14296,7 @@
         <p:spPr>
           <a:xfrm>
             <a:off x="4663440" y="1097280"/>
-            <a:ext cx="72720" cy="72720"/>
+            <a:ext cx="72360" cy="72360"/>
           </a:xfrm>
           <a:prstGeom prst="ellipse">
             <a:avLst/>
@@ -13635,6 +14324,11 @@
             <a:noAutofit/>
           </a:bodyPr>
           <a:p>
+            <a:pPr>
+              <a:lnSpc>
+                <a:spcPct val="100000"/>
+              </a:lnSpc>
+            </a:pPr>
             <a:endParaRPr b="0" lang="en-US" sz="1800" spc="-1" strike="noStrike">
               <a:solidFill>
                 <a:srgbClr val="ffffff"/>
@@ -13653,7 +14347,7 @@
         <p:spPr>
           <a:xfrm>
             <a:off x="5760720" y="1097280"/>
-            <a:ext cx="72720" cy="72720"/>
+            <a:ext cx="72360" cy="72360"/>
           </a:xfrm>
           <a:prstGeom prst="ellipse">
             <a:avLst/>
@@ -13681,6 +14375,11 @@
             <a:noAutofit/>
           </a:bodyPr>
           <a:p>
+            <a:pPr>
+              <a:lnSpc>
+                <a:spcPct val="100000"/>
+              </a:lnSpc>
+            </a:pPr>
             <a:endParaRPr b="0" lang="en-US" sz="1800" spc="-1" strike="noStrike">
               <a:solidFill>
                 <a:srgbClr val="ffffff"/>
@@ -13699,7 +14398,7 @@
         <p:spPr>
           <a:xfrm>
             <a:off x="6858000" y="1097280"/>
-            <a:ext cx="72720" cy="72720"/>
+            <a:ext cx="72360" cy="72360"/>
           </a:xfrm>
           <a:prstGeom prst="ellipse">
             <a:avLst/>
@@ -13727,6 +14426,11 @@
             <a:noAutofit/>
           </a:bodyPr>
           <a:p>
+            <a:pPr>
+              <a:lnSpc>
+                <a:spcPct val="100000"/>
+              </a:lnSpc>
+            </a:pPr>
             <a:endParaRPr b="0" lang="en-US" sz="1800" spc="-1" strike="noStrike">
               <a:solidFill>
                 <a:srgbClr val="ffffff"/>
@@ -13745,7 +14449,7 @@
         <p:spPr>
           <a:xfrm>
             <a:off x="7955280" y="1097280"/>
-            <a:ext cx="72720" cy="72720"/>
+            <a:ext cx="72360" cy="72360"/>
           </a:xfrm>
           <a:prstGeom prst="ellipse">
             <a:avLst/>
@@ -13773,6 +14477,11 @@
             <a:noAutofit/>
           </a:bodyPr>
           <a:p>
+            <a:pPr>
+              <a:lnSpc>
+                <a:spcPct val="100000"/>
+              </a:lnSpc>
+            </a:pPr>
             <a:endParaRPr b="0" lang="en-US" sz="1800" spc="-1" strike="noStrike">
               <a:solidFill>
                 <a:srgbClr val="ffffff"/>
@@ -13791,7 +14500,7 @@
         <p:spPr>
           <a:xfrm>
             <a:off x="274320" y="2011680"/>
-            <a:ext cx="72720" cy="72720"/>
+            <a:ext cx="72360" cy="72360"/>
           </a:xfrm>
           <a:prstGeom prst="ellipse">
             <a:avLst/>
@@ -13819,6 +14528,11 @@
             <a:noAutofit/>
           </a:bodyPr>
           <a:p>
+            <a:pPr>
+              <a:lnSpc>
+                <a:spcPct val="100000"/>
+              </a:lnSpc>
+            </a:pPr>
             <a:endParaRPr b="0" lang="en-US" sz="1800" spc="-1" strike="noStrike">
               <a:solidFill>
                 <a:srgbClr val="ffffff"/>
@@ -13837,7 +14551,7 @@
         <p:spPr>
           <a:xfrm>
             <a:off x="1371600" y="2011680"/>
-            <a:ext cx="72720" cy="72720"/>
+            <a:ext cx="72360" cy="72360"/>
           </a:xfrm>
           <a:prstGeom prst="ellipse">
             <a:avLst/>
@@ -13865,6 +14579,11 @@
             <a:noAutofit/>
           </a:bodyPr>
           <a:p>
+            <a:pPr>
+              <a:lnSpc>
+                <a:spcPct val="100000"/>
+              </a:lnSpc>
+            </a:pPr>
             <a:endParaRPr b="0" lang="en-US" sz="1800" spc="-1" strike="noStrike">
               <a:solidFill>
                 <a:srgbClr val="ffffff"/>
@@ -13883,7 +14602,7 @@
         <p:spPr>
           <a:xfrm>
             <a:off x="2468880" y="2011680"/>
-            <a:ext cx="72720" cy="72720"/>
+            <a:ext cx="72360" cy="72360"/>
           </a:xfrm>
           <a:prstGeom prst="ellipse">
             <a:avLst/>
@@ -13911,6 +14630,11 @@
             <a:noAutofit/>
           </a:bodyPr>
           <a:p>
+            <a:pPr>
+              <a:lnSpc>
+                <a:spcPct val="100000"/>
+              </a:lnSpc>
+            </a:pPr>
             <a:endParaRPr b="0" lang="en-US" sz="1800" spc="-1" strike="noStrike">
               <a:solidFill>
                 <a:srgbClr val="ffffff"/>
@@ -13929,7 +14653,7 @@
         <p:spPr>
           <a:xfrm>
             <a:off x="3566160" y="2011680"/>
-            <a:ext cx="72720" cy="72720"/>
+            <a:ext cx="72360" cy="72360"/>
           </a:xfrm>
           <a:prstGeom prst="ellipse">
             <a:avLst/>
@@ -13957,6 +14681,11 @@
             <a:noAutofit/>
           </a:bodyPr>
           <a:p>
+            <a:pPr>
+              <a:lnSpc>
+                <a:spcPct val="100000"/>
+              </a:lnSpc>
+            </a:pPr>
             <a:endParaRPr b="0" lang="en-US" sz="1800" spc="-1" strike="noStrike">
               <a:solidFill>
                 <a:srgbClr val="ffffff"/>
@@ -13975,7 +14704,7 @@
         <p:spPr>
           <a:xfrm>
             <a:off x="4663440" y="2011680"/>
-            <a:ext cx="72720" cy="72720"/>
+            <a:ext cx="72360" cy="72360"/>
           </a:xfrm>
           <a:prstGeom prst="ellipse">
             <a:avLst/>
@@ -14003,6 +14732,11 @@
             <a:noAutofit/>
           </a:bodyPr>
           <a:p>
+            <a:pPr>
+              <a:lnSpc>
+                <a:spcPct val="100000"/>
+              </a:lnSpc>
+            </a:pPr>
             <a:endParaRPr b="0" lang="en-US" sz="1800" spc="-1" strike="noStrike">
               <a:solidFill>
                 <a:srgbClr val="ffffff"/>
@@ -14021,7 +14755,7 @@
         <p:spPr>
           <a:xfrm>
             <a:off x="5760720" y="2011680"/>
-            <a:ext cx="72720" cy="72720"/>
+            <a:ext cx="72360" cy="72360"/>
           </a:xfrm>
           <a:prstGeom prst="ellipse">
             <a:avLst/>
@@ -14049,6 +14783,11 @@
             <a:noAutofit/>
           </a:bodyPr>
           <a:p>
+            <a:pPr>
+              <a:lnSpc>
+                <a:spcPct val="100000"/>
+              </a:lnSpc>
+            </a:pPr>
             <a:endParaRPr b="0" lang="en-US" sz="1800" spc="-1" strike="noStrike">
               <a:solidFill>
                 <a:srgbClr val="ffffff"/>
@@ -14067,7 +14806,7 @@
         <p:spPr>
           <a:xfrm>
             <a:off x="6858000" y="2011680"/>
-            <a:ext cx="72720" cy="72720"/>
+            <a:ext cx="72360" cy="72360"/>
           </a:xfrm>
           <a:prstGeom prst="ellipse">
             <a:avLst/>
@@ -14095,6 +14834,11 @@
             <a:noAutofit/>
           </a:bodyPr>
           <a:p>
+            <a:pPr>
+              <a:lnSpc>
+                <a:spcPct val="100000"/>
+              </a:lnSpc>
+            </a:pPr>
             <a:endParaRPr b="0" lang="en-US" sz="1800" spc="-1" strike="noStrike">
               <a:solidFill>
                 <a:srgbClr val="ffffff"/>
@@ -14113,7 +14857,7 @@
         <p:spPr>
           <a:xfrm>
             <a:off x="7955280" y="2011680"/>
-            <a:ext cx="72720" cy="72720"/>
+            <a:ext cx="72360" cy="72360"/>
           </a:xfrm>
           <a:prstGeom prst="ellipse">
             <a:avLst/>
@@ -14141,6 +14885,11 @@
             <a:noAutofit/>
           </a:bodyPr>
           <a:p>
+            <a:pPr>
+              <a:lnSpc>
+                <a:spcPct val="100000"/>
+              </a:lnSpc>
+            </a:pPr>
             <a:endParaRPr b="0" lang="en-US" sz="1800" spc="-1" strike="noStrike">
               <a:solidFill>
                 <a:srgbClr val="ffffff"/>
@@ -14159,7 +14908,7 @@
         <p:spPr>
           <a:xfrm>
             <a:off x="274320" y="2926080"/>
-            <a:ext cx="72720" cy="72720"/>
+            <a:ext cx="72360" cy="72360"/>
           </a:xfrm>
           <a:prstGeom prst="ellipse">
             <a:avLst/>
@@ -14187,6 +14936,11 @@
             <a:noAutofit/>
           </a:bodyPr>
           <a:p>
+            <a:pPr>
+              <a:lnSpc>
+                <a:spcPct val="100000"/>
+              </a:lnSpc>
+            </a:pPr>
             <a:endParaRPr b="0" lang="en-US" sz="1800" spc="-1" strike="noStrike">
               <a:solidFill>
                 <a:srgbClr val="ffffff"/>
@@ -14205,7 +14959,7 @@
         <p:spPr>
           <a:xfrm>
             <a:off x="1371600" y="2926080"/>
-            <a:ext cx="72720" cy="72720"/>
+            <a:ext cx="72360" cy="72360"/>
           </a:xfrm>
           <a:prstGeom prst="ellipse">
             <a:avLst/>
@@ -14233,6 +14987,11 @@
             <a:noAutofit/>
           </a:bodyPr>
           <a:p>
+            <a:pPr>
+              <a:lnSpc>
+                <a:spcPct val="100000"/>
+              </a:lnSpc>
+            </a:pPr>
             <a:endParaRPr b="0" lang="en-US" sz="1800" spc="-1" strike="noStrike">
               <a:solidFill>
                 <a:srgbClr val="ffffff"/>
@@ -14251,7 +15010,7 @@
         <p:spPr>
           <a:xfrm>
             <a:off x="2468880" y="2926080"/>
-            <a:ext cx="72720" cy="72720"/>
+            <a:ext cx="72360" cy="72360"/>
           </a:xfrm>
           <a:prstGeom prst="ellipse">
             <a:avLst/>
@@ -14279,6 +15038,11 @@
             <a:noAutofit/>
           </a:bodyPr>
           <a:p>
+            <a:pPr>
+              <a:lnSpc>
+                <a:spcPct val="100000"/>
+              </a:lnSpc>
+            </a:pPr>
             <a:endParaRPr b="0" lang="en-US" sz="1800" spc="-1" strike="noStrike">
               <a:solidFill>
                 <a:srgbClr val="ffffff"/>
@@ -14297,7 +15061,7 @@
         <p:spPr>
           <a:xfrm>
             <a:off x="3566160" y="2926080"/>
-            <a:ext cx="72720" cy="72720"/>
+            <a:ext cx="72360" cy="72360"/>
           </a:xfrm>
           <a:prstGeom prst="ellipse">
             <a:avLst/>
@@ -14325,6 +15089,11 @@
             <a:noAutofit/>
           </a:bodyPr>
           <a:p>
+            <a:pPr>
+              <a:lnSpc>
+                <a:spcPct val="100000"/>
+              </a:lnSpc>
+            </a:pPr>
             <a:endParaRPr b="0" lang="en-US" sz="1800" spc="-1" strike="noStrike">
               <a:solidFill>
                 <a:srgbClr val="ffffff"/>
@@ -14343,7 +15112,7 @@
         <p:spPr>
           <a:xfrm>
             <a:off x="4663440" y="2926080"/>
-            <a:ext cx="72720" cy="72720"/>
+            <a:ext cx="72360" cy="72360"/>
           </a:xfrm>
           <a:prstGeom prst="ellipse">
             <a:avLst/>
@@ -14371,6 +15140,11 @@
             <a:noAutofit/>
           </a:bodyPr>
           <a:p>
+            <a:pPr>
+              <a:lnSpc>
+                <a:spcPct val="100000"/>
+              </a:lnSpc>
+            </a:pPr>
             <a:endParaRPr b="0" lang="en-US" sz="1800" spc="-1" strike="noStrike">
               <a:solidFill>
                 <a:srgbClr val="ffffff"/>
@@ -14389,7 +15163,7 @@
         <p:spPr>
           <a:xfrm>
             <a:off x="5760720" y="2926080"/>
-            <a:ext cx="72720" cy="72720"/>
+            <a:ext cx="72360" cy="72360"/>
           </a:xfrm>
           <a:prstGeom prst="ellipse">
             <a:avLst/>
@@ -14417,6 +15191,11 @@
             <a:noAutofit/>
           </a:bodyPr>
           <a:p>
+            <a:pPr>
+              <a:lnSpc>
+                <a:spcPct val="100000"/>
+              </a:lnSpc>
+            </a:pPr>
             <a:endParaRPr b="0" lang="en-US" sz="1800" spc="-1" strike="noStrike">
               <a:solidFill>
                 <a:srgbClr val="ffffff"/>
@@ -14435,7 +15214,7 @@
         <p:spPr>
           <a:xfrm>
             <a:off x="6858000" y="2926080"/>
-            <a:ext cx="72720" cy="72720"/>
+            <a:ext cx="72360" cy="72360"/>
           </a:xfrm>
           <a:prstGeom prst="ellipse">
             <a:avLst/>
@@ -14463,6 +15242,11 @@
             <a:noAutofit/>
           </a:bodyPr>
           <a:p>
+            <a:pPr>
+              <a:lnSpc>
+                <a:spcPct val="100000"/>
+              </a:lnSpc>
+            </a:pPr>
             <a:endParaRPr b="0" lang="en-US" sz="1800" spc="-1" strike="noStrike">
               <a:solidFill>
                 <a:srgbClr val="ffffff"/>
@@ -14481,7 +15265,7 @@
         <p:spPr>
           <a:xfrm>
             <a:off x="7955280" y="2926080"/>
-            <a:ext cx="72720" cy="72720"/>
+            <a:ext cx="72360" cy="72360"/>
           </a:xfrm>
           <a:prstGeom prst="ellipse">
             <a:avLst/>
@@ -14509,6 +15293,11 @@
             <a:noAutofit/>
           </a:bodyPr>
           <a:p>
+            <a:pPr>
+              <a:lnSpc>
+                <a:spcPct val="100000"/>
+              </a:lnSpc>
+            </a:pPr>
             <a:endParaRPr b="0" lang="en-US" sz="1800" spc="-1" strike="noStrike">
               <a:solidFill>
                 <a:srgbClr val="ffffff"/>
@@ -14527,7 +15316,7 @@
         <p:spPr>
           <a:xfrm>
             <a:off x="274320" y="3840480"/>
-            <a:ext cx="72720" cy="72720"/>
+            <a:ext cx="72360" cy="72360"/>
           </a:xfrm>
           <a:prstGeom prst="ellipse">
             <a:avLst/>
@@ -14555,6 +15344,11 @@
             <a:noAutofit/>
           </a:bodyPr>
           <a:p>
+            <a:pPr>
+              <a:lnSpc>
+                <a:spcPct val="100000"/>
+              </a:lnSpc>
+            </a:pPr>
             <a:endParaRPr b="0" lang="en-US" sz="1800" spc="-1" strike="noStrike">
               <a:solidFill>
                 <a:srgbClr val="ffffff"/>
@@ -14573,7 +15367,7 @@
         <p:spPr>
           <a:xfrm>
             <a:off x="1371600" y="3840480"/>
-            <a:ext cx="72720" cy="72720"/>
+            <a:ext cx="72360" cy="72360"/>
           </a:xfrm>
           <a:prstGeom prst="ellipse">
             <a:avLst/>
@@ -14601,6 +15395,11 @@
             <a:noAutofit/>
           </a:bodyPr>
           <a:p>
+            <a:pPr>
+              <a:lnSpc>
+                <a:spcPct val="100000"/>
+              </a:lnSpc>
+            </a:pPr>
             <a:endParaRPr b="0" lang="en-US" sz="1800" spc="-1" strike="noStrike">
               <a:solidFill>
                 <a:srgbClr val="ffffff"/>
@@ -14619,7 +15418,7 @@
         <p:spPr>
           <a:xfrm>
             <a:off x="2468880" y="3840480"/>
-            <a:ext cx="72720" cy="72720"/>
+            <a:ext cx="72360" cy="72360"/>
           </a:xfrm>
           <a:prstGeom prst="ellipse">
             <a:avLst/>
@@ -14647,6 +15446,11 @@
             <a:noAutofit/>
           </a:bodyPr>
           <a:p>
+            <a:pPr>
+              <a:lnSpc>
+                <a:spcPct val="100000"/>
+              </a:lnSpc>
+            </a:pPr>
             <a:endParaRPr b="0" lang="en-US" sz="1800" spc="-1" strike="noStrike">
               <a:solidFill>
                 <a:srgbClr val="ffffff"/>
@@ -14665,7 +15469,7 @@
         <p:spPr>
           <a:xfrm>
             <a:off x="3566160" y="3840480"/>
-            <a:ext cx="72720" cy="72720"/>
+            <a:ext cx="72360" cy="72360"/>
           </a:xfrm>
           <a:prstGeom prst="ellipse">
             <a:avLst/>
@@ -14693,6 +15497,11 @@
             <a:noAutofit/>
           </a:bodyPr>
           <a:p>
+            <a:pPr>
+              <a:lnSpc>
+                <a:spcPct val="100000"/>
+              </a:lnSpc>
+            </a:pPr>
             <a:endParaRPr b="0" lang="en-US" sz="1800" spc="-1" strike="noStrike">
               <a:solidFill>
                 <a:srgbClr val="ffffff"/>
@@ -14711,7 +15520,7 @@
         <p:spPr>
           <a:xfrm>
             <a:off x="4663440" y="3840480"/>
-            <a:ext cx="72720" cy="72720"/>
+            <a:ext cx="72360" cy="72360"/>
           </a:xfrm>
           <a:prstGeom prst="ellipse">
             <a:avLst/>
@@ -14739,6 +15548,11 @@
             <a:noAutofit/>
           </a:bodyPr>
           <a:p>
+            <a:pPr>
+              <a:lnSpc>
+                <a:spcPct val="100000"/>
+              </a:lnSpc>
+            </a:pPr>
             <a:endParaRPr b="0" lang="en-US" sz="1800" spc="-1" strike="noStrike">
               <a:solidFill>
                 <a:srgbClr val="ffffff"/>
@@ -14757,7 +15571,7 @@
         <p:spPr>
           <a:xfrm>
             <a:off x="5760720" y="3840480"/>
-            <a:ext cx="72720" cy="72720"/>
+            <a:ext cx="72360" cy="72360"/>
           </a:xfrm>
           <a:prstGeom prst="ellipse">
             <a:avLst/>
@@ -14785,6 +15599,11 @@
             <a:noAutofit/>
           </a:bodyPr>
           <a:p>
+            <a:pPr>
+              <a:lnSpc>
+                <a:spcPct val="100000"/>
+              </a:lnSpc>
+            </a:pPr>
             <a:endParaRPr b="0" lang="en-US" sz="1800" spc="-1" strike="noStrike">
               <a:solidFill>
                 <a:srgbClr val="ffffff"/>
@@ -14803,7 +15622,7 @@
         <p:spPr>
           <a:xfrm>
             <a:off x="6858000" y="3840480"/>
-            <a:ext cx="72720" cy="72720"/>
+            <a:ext cx="72360" cy="72360"/>
           </a:xfrm>
           <a:prstGeom prst="ellipse">
             <a:avLst/>
@@ -14831,6 +15650,11 @@
             <a:noAutofit/>
           </a:bodyPr>
           <a:p>
+            <a:pPr>
+              <a:lnSpc>
+                <a:spcPct val="100000"/>
+              </a:lnSpc>
+            </a:pPr>
             <a:endParaRPr b="0" lang="en-US" sz="1800" spc="-1" strike="noStrike">
               <a:solidFill>
                 <a:srgbClr val="ffffff"/>
@@ -14849,7 +15673,7 @@
         <p:spPr>
           <a:xfrm>
             <a:off x="7955280" y="3840480"/>
-            <a:ext cx="72720" cy="72720"/>
+            <a:ext cx="72360" cy="72360"/>
           </a:xfrm>
           <a:prstGeom prst="ellipse">
             <a:avLst/>
@@ -14877,6 +15701,11 @@
             <a:noAutofit/>
           </a:bodyPr>
           <a:p>
+            <a:pPr>
+              <a:lnSpc>
+                <a:spcPct val="100000"/>
+              </a:lnSpc>
+            </a:pPr>
             <a:endParaRPr b="0" lang="en-US" sz="1800" spc="-1" strike="noStrike">
               <a:solidFill>
                 <a:srgbClr val="ffffff"/>
@@ -14895,7 +15724,7 @@
         <p:spPr>
           <a:xfrm>
             <a:off x="1371600" y="640080"/>
-            <a:ext cx="6400440" cy="3931560"/>
+            <a:ext cx="6400080" cy="3931200"/>
           </a:xfrm>
           <a:prstGeom prst="rect">
             <a:avLst/>
@@ -14928,6 +15757,11 @@
             <a:noAutofit/>
           </a:bodyPr>
           <a:p>
+            <a:pPr>
+              <a:lnSpc>
+                <a:spcPct val="100000"/>
+              </a:lnSpc>
+            </a:pPr>
             <a:endParaRPr b="0" lang="en-US" sz="1800" spc="-1" strike="noStrike">
               <a:solidFill>
                 <a:srgbClr val="ffffff"/>
@@ -14946,7 +15780,7 @@
         <p:spPr>
           <a:xfrm>
             <a:off x="1371600" y="777240"/>
-            <a:ext cx="6400440" cy="456840"/>
+            <a:ext cx="6400080" cy="456480"/>
           </a:xfrm>
           <a:prstGeom prst="rect">
             <a:avLst/>
@@ -15002,7 +15836,7 @@
         <p:spPr>
           <a:xfrm>
             <a:off x="3200400" y="1280160"/>
-            <a:ext cx="2742840" cy="45360"/>
+            <a:ext cx="2742480" cy="45000"/>
           </a:xfrm>
           <a:prstGeom prst="rect">
             <a:avLst/>
@@ -15028,6 +15862,11 @@
             <a:noAutofit/>
           </a:bodyPr>
           <a:p>
+            <a:pPr>
+              <a:lnSpc>
+                <a:spcPct val="100000"/>
+              </a:lnSpc>
+            </a:pPr>
             <a:endParaRPr b="0" lang="en-US" sz="1800" spc="-1" strike="noStrike">
               <a:solidFill>
                 <a:srgbClr val="ffffff"/>
@@ -15046,7 +15885,7 @@
         <p:spPr>
           <a:xfrm>
             <a:off x="1645920" y="1508760"/>
-            <a:ext cx="255600" cy="255600"/>
+            <a:ext cx="255240" cy="255240"/>
           </a:xfrm>
           <a:prstGeom prst="rect">
             <a:avLst/>
@@ -15072,6 +15911,11 @@
             <a:noAutofit/>
           </a:bodyPr>
           <a:p>
+            <a:pPr>
+              <a:lnSpc>
+                <a:spcPct val="100000"/>
+              </a:lnSpc>
+            </a:pPr>
             <a:endParaRPr b="0" lang="en-US" sz="1800" spc="-1" strike="noStrike">
               <a:solidFill>
                 <a:srgbClr val="ffffff"/>
@@ -15090,7 +15934,7 @@
         <p:spPr>
           <a:xfrm>
             <a:off x="1645920" y="1508760"/>
-            <a:ext cx="255600" cy="255600"/>
+            <a:ext cx="255240" cy="255240"/>
           </a:xfrm>
           <a:prstGeom prst="rect">
             <a:avLst/>
@@ -15146,7 +15990,7 @@
         <p:spPr>
           <a:xfrm>
             <a:off x="2057400" y="1508760"/>
-            <a:ext cx="5486040" cy="347040"/>
+            <a:ext cx="5485680" cy="346680"/>
           </a:xfrm>
           <a:prstGeom prst="rect">
             <a:avLst/>
@@ -15202,7 +16046,7 @@
         <p:spPr>
           <a:xfrm>
             <a:off x="1645920" y="2020680"/>
-            <a:ext cx="255600" cy="255600"/>
+            <a:ext cx="255240" cy="255240"/>
           </a:xfrm>
           <a:prstGeom prst="rect">
             <a:avLst/>
@@ -15228,6 +16072,11 @@
             <a:noAutofit/>
           </a:bodyPr>
           <a:p>
+            <a:pPr>
+              <a:lnSpc>
+                <a:spcPct val="100000"/>
+              </a:lnSpc>
+            </a:pPr>
             <a:endParaRPr b="0" lang="en-US" sz="1800" spc="-1" strike="noStrike">
               <a:solidFill>
                 <a:srgbClr val="ffffff"/>
@@ -15246,7 +16095,7 @@
         <p:spPr>
           <a:xfrm>
             <a:off x="1645920" y="2020680"/>
-            <a:ext cx="255600" cy="255600"/>
+            <a:ext cx="255240" cy="255240"/>
           </a:xfrm>
           <a:prstGeom prst="rect">
             <a:avLst/>
@@ -15302,7 +16151,7 @@
         <p:spPr>
           <a:xfrm>
             <a:off x="2057400" y="2020680"/>
-            <a:ext cx="5486040" cy="347040"/>
+            <a:ext cx="5485680" cy="346680"/>
           </a:xfrm>
           <a:prstGeom prst="rect">
             <a:avLst/>
@@ -15358,7 +16207,7 @@
         <p:spPr>
           <a:xfrm>
             <a:off x="1645920" y="2532960"/>
-            <a:ext cx="255600" cy="255600"/>
+            <a:ext cx="255240" cy="255240"/>
           </a:xfrm>
           <a:prstGeom prst="rect">
             <a:avLst/>
@@ -15384,6 +16233,11 @@
             <a:noAutofit/>
           </a:bodyPr>
           <a:p>
+            <a:pPr>
+              <a:lnSpc>
+                <a:spcPct val="100000"/>
+              </a:lnSpc>
+            </a:pPr>
             <a:endParaRPr b="0" lang="en-US" sz="1800" spc="-1" strike="noStrike">
               <a:solidFill>
                 <a:srgbClr val="ffffff"/>
@@ -15402,7 +16256,7 @@
         <p:spPr>
           <a:xfrm>
             <a:off x="1645920" y="2532960"/>
-            <a:ext cx="255600" cy="255600"/>
+            <a:ext cx="255240" cy="255240"/>
           </a:xfrm>
           <a:prstGeom prst="rect">
             <a:avLst/>
@@ -15458,7 +16312,7 @@
         <p:spPr>
           <a:xfrm>
             <a:off x="2057400" y="2532960"/>
-            <a:ext cx="5486040" cy="347040"/>
+            <a:ext cx="5485680" cy="346680"/>
           </a:xfrm>
           <a:prstGeom prst="rect">
             <a:avLst/>
@@ -15514,7 +16368,7 @@
         <p:spPr>
           <a:xfrm>
             <a:off x="1645920" y="3044880"/>
-            <a:ext cx="255600" cy="255600"/>
+            <a:ext cx="255240" cy="255240"/>
           </a:xfrm>
           <a:prstGeom prst="rect">
             <a:avLst/>
@@ -15540,6 +16394,11 @@
             <a:noAutofit/>
           </a:bodyPr>
           <a:p>
+            <a:pPr>
+              <a:lnSpc>
+                <a:spcPct val="100000"/>
+              </a:lnSpc>
+            </a:pPr>
             <a:endParaRPr b="0" lang="en-US" sz="1800" spc="-1" strike="noStrike">
               <a:solidFill>
                 <a:srgbClr val="ffffff"/>
@@ -15558,7 +16417,7 @@
         <p:spPr>
           <a:xfrm>
             <a:off x="1645920" y="3044880"/>
-            <a:ext cx="255600" cy="255600"/>
+            <a:ext cx="255240" cy="255240"/>
           </a:xfrm>
           <a:prstGeom prst="rect">
             <a:avLst/>
@@ -15614,7 +16473,7 @@
         <p:spPr>
           <a:xfrm>
             <a:off x="2057400" y="3044880"/>
-            <a:ext cx="5486040" cy="347040"/>
+            <a:ext cx="5485680" cy="346680"/>
           </a:xfrm>
           <a:prstGeom prst="rect">
             <a:avLst/>
@@ -15670,7 +16529,7 @@
         <p:spPr>
           <a:xfrm>
             <a:off x="1645920" y="3557160"/>
-            <a:ext cx="255600" cy="255600"/>
+            <a:ext cx="255240" cy="255240"/>
           </a:xfrm>
           <a:prstGeom prst="rect">
             <a:avLst/>
@@ -15696,6 +16555,11 @@
             <a:noAutofit/>
           </a:bodyPr>
           <a:p>
+            <a:pPr>
+              <a:lnSpc>
+                <a:spcPct val="100000"/>
+              </a:lnSpc>
+            </a:pPr>
             <a:endParaRPr b="0" lang="en-US" sz="1800" spc="-1" strike="noStrike">
               <a:solidFill>
                 <a:srgbClr val="ffffff"/>
@@ -15714,7 +16578,7 @@
         <p:spPr>
           <a:xfrm>
             <a:off x="1645920" y="3557160"/>
-            <a:ext cx="255600" cy="255600"/>
+            <a:ext cx="255240" cy="255240"/>
           </a:xfrm>
           <a:prstGeom prst="rect">
             <a:avLst/>
@@ -15770,7 +16634,7 @@
         <p:spPr>
           <a:xfrm>
             <a:off x="2057400" y="3557160"/>
-            <a:ext cx="5486040" cy="347040"/>
+            <a:ext cx="5485680" cy="346680"/>
           </a:xfrm>
           <a:prstGeom prst="rect">
             <a:avLst/>
@@ -15826,7 +16690,7 @@
         <p:spPr>
           <a:xfrm>
             <a:off x="1371600" y="4343400"/>
-            <a:ext cx="6400440" cy="182520"/>
+            <a:ext cx="6400080" cy="182160"/>
           </a:xfrm>
           <a:prstGeom prst="rect">
             <a:avLst/>
@@ -15855,16 +16719,7 @@
                 <a:tab algn="l" pos="0"/>
               </a:tabLst>
             </a:pPr>
-            <a:r>
-              <a:rPr b="0" i="1" lang="en-US" sz="900" spc="-1" strike="noStrike">
-                <a:solidFill>
-                  <a:srgbClr val="8fbdd3"/>
-                </a:solidFill>
-                <a:latin typeface="Calibri"/>
-              </a:rPr>
-              <a:t>Source: geeksforgeeks.org/data-science/clique-algorithm-in-data-mining/</a:t>
-            </a:r>
-            <a:endParaRPr b="0" lang="en-US" sz="900" spc="-1" strike="noStrike">
+            <a:endParaRPr b="0" lang="en-US" sz="1800" spc="-1" strike="noStrike">
               <a:solidFill>
                 <a:srgbClr val="ffffff"/>
               </a:solidFill>
